--- a/koreatech-db/weeks/06주차_집계와_그룹화.pptx
+++ b/koreatech-db/weeks/06주차_집계와_그룹화.pptx
@@ -4174,9 +4174,9 @@
                 <a:solidFill>
                   <a:srgbClr val="7A869C"/>
                 </a:solidFill>
-                <a:latin typeface="나눔고딕코딩"/>
-                <a:ea typeface="나눔고딕코딩"/>
-                <a:cs typeface="나눔고딕코딩"/>
+                <a:latin typeface="D2Coding"/>
+                <a:ea typeface="D2Coding"/>
+                <a:cs typeface="D2Coding"/>
               </a:rPr>
               <a:t>1</a:t>
             </a:r>
@@ -4192,9 +4192,9 @@
                 <a:solidFill>
                   <a:srgbClr val="7A869C"/>
                 </a:solidFill>
-                <a:latin typeface="나눔고딕코딩"/>
-                <a:ea typeface="나눔고딕코딩"/>
-                <a:cs typeface="나눔고딕코딩"/>
+                <a:latin typeface="D2Coding"/>
+                <a:ea typeface="D2Coding"/>
+                <a:cs typeface="D2Coding"/>
               </a:rPr>
               <a:t>2</a:t>
             </a:r>
@@ -4210,9 +4210,9 @@
                 <a:solidFill>
                   <a:srgbClr val="7A869C"/>
                 </a:solidFill>
-                <a:latin typeface="나눔고딕코딩"/>
-                <a:ea typeface="나눔고딕코딩"/>
-                <a:cs typeface="나눔고딕코딩"/>
+                <a:latin typeface="D2Coding"/>
+                <a:ea typeface="D2Coding"/>
+                <a:cs typeface="D2Coding"/>
               </a:rPr>
               <a:t>3</a:t>
             </a:r>
@@ -4228,9 +4228,9 @@
                 <a:solidFill>
                   <a:srgbClr val="7A869C"/>
                 </a:solidFill>
-                <a:latin typeface="나눔고딕코딩"/>
-                <a:ea typeface="나눔고딕코딩"/>
-                <a:cs typeface="나눔고딕코딩"/>
+                <a:latin typeface="D2Coding"/>
+                <a:ea typeface="D2Coding"/>
+                <a:cs typeface="D2Coding"/>
               </a:rPr>
               <a:t>4</a:t>
             </a:r>
@@ -4246,9 +4246,9 @@
                 <a:solidFill>
                   <a:srgbClr val="7A869C"/>
                 </a:solidFill>
-                <a:latin typeface="나눔고딕코딩"/>
-                <a:ea typeface="나눔고딕코딩"/>
-                <a:cs typeface="나눔고딕코딩"/>
+                <a:latin typeface="D2Coding"/>
+                <a:ea typeface="D2Coding"/>
+                <a:cs typeface="D2Coding"/>
               </a:rPr>
               <a:t>5</a:t>
             </a:r>
@@ -4264,9 +4264,9 @@
                 <a:solidFill>
                   <a:srgbClr val="7A869C"/>
                 </a:solidFill>
-                <a:latin typeface="나눔고딕코딩"/>
-                <a:ea typeface="나눔고딕코딩"/>
-                <a:cs typeface="나눔고딕코딩"/>
+                <a:latin typeface="D2Coding"/>
+                <a:ea typeface="D2Coding"/>
+                <a:cs typeface="D2Coding"/>
               </a:rPr>
               <a:t>6</a:t>
             </a:r>
@@ -4282,9 +4282,9 @@
                 <a:solidFill>
                   <a:srgbClr val="7A869C"/>
                 </a:solidFill>
-                <a:latin typeface="나눔고딕코딩"/>
-                <a:ea typeface="나눔고딕코딩"/>
-                <a:cs typeface="나눔고딕코딩"/>
+                <a:latin typeface="D2Coding"/>
+                <a:ea typeface="D2Coding"/>
+                <a:cs typeface="D2Coding"/>
               </a:rPr>
               <a:t>7</a:t>
             </a:r>
@@ -4300,9 +4300,9 @@
                 <a:solidFill>
                   <a:srgbClr val="7A869C"/>
                 </a:solidFill>
-                <a:latin typeface="나눔고딕코딩"/>
-                <a:ea typeface="나눔고딕코딩"/>
-                <a:cs typeface="나눔고딕코딩"/>
+                <a:latin typeface="D2Coding"/>
+                <a:ea typeface="D2Coding"/>
+                <a:cs typeface="D2Coding"/>
               </a:rPr>
               <a:t>8</a:t>
             </a:r>
@@ -4318,9 +4318,9 @@
                 <a:solidFill>
                   <a:srgbClr val="7A869C"/>
                 </a:solidFill>
-                <a:latin typeface="나눔고딕코딩"/>
-                <a:ea typeface="나눔고딕코딩"/>
-                <a:cs typeface="나눔고딕코딩"/>
+                <a:latin typeface="D2Coding"/>
+                <a:ea typeface="D2Coding"/>
+                <a:cs typeface="D2Coding"/>
               </a:rPr>
               <a:t>9</a:t>
             </a:r>
@@ -4336,9 +4336,9 @@
                 <a:solidFill>
                   <a:srgbClr val="7A869C"/>
                 </a:solidFill>
-                <a:latin typeface="나눔고딕코딩"/>
-                <a:ea typeface="나눔고딕코딩"/>
-                <a:cs typeface="나눔고딕코딩"/>
+                <a:latin typeface="D2Coding"/>
+                <a:ea typeface="D2Coding"/>
+                <a:cs typeface="D2Coding"/>
               </a:rPr>
               <a:t>10</a:t>
             </a:r>
@@ -4354,9 +4354,9 @@
                 <a:solidFill>
                   <a:srgbClr val="7A869C"/>
                 </a:solidFill>
-                <a:latin typeface="나눔고딕코딩"/>
-                <a:ea typeface="나눔고딕코딩"/>
-                <a:cs typeface="나눔고딕코딩"/>
+                <a:latin typeface="D2Coding"/>
+                <a:ea typeface="D2Coding"/>
+                <a:cs typeface="D2Coding"/>
               </a:rPr>
               <a:t>11</a:t>
             </a:r>
@@ -4372,9 +4372,9 @@
                 <a:solidFill>
                   <a:srgbClr val="7A869C"/>
                 </a:solidFill>
-                <a:latin typeface="나눔고딕코딩"/>
-                <a:ea typeface="나눔고딕코딩"/>
-                <a:cs typeface="나눔고딕코딩"/>
+                <a:latin typeface="D2Coding"/>
+                <a:ea typeface="D2Coding"/>
+                <a:cs typeface="D2Coding"/>
               </a:rPr>
               <a:t>12</a:t>
             </a:r>
@@ -4413,9 +4413,9 @@
                 <a:solidFill>
                   <a:srgbClr val="E6EAF2"/>
                 </a:solidFill>
-                <a:latin typeface="나눔고딕코딩"/>
-                <a:ea typeface="나눔고딕코딩"/>
-                <a:cs typeface="나눔고딕코딩"/>
+                <a:latin typeface="D2Coding"/>
+                <a:ea typeface="D2Coding"/>
+                <a:cs typeface="D2Coding"/>
               </a:rPr>
               <a:t>SELECT grade, name, COUNT(*)</a:t>
             </a:r>
@@ -4431,9 +4431,9 @@
                 <a:solidFill>
                   <a:srgbClr val="E6EAF2"/>
                 </a:solidFill>
-                <a:latin typeface="나눔고딕코딩"/>
-                <a:ea typeface="나눔고딕코딩"/>
-                <a:cs typeface="나눔고딕코딩"/>
+                <a:latin typeface="D2Coding"/>
+                <a:ea typeface="D2Coding"/>
+                <a:cs typeface="D2Coding"/>
               </a:rPr>
               <a:t>FROM   customers</a:t>
             </a:r>
@@ -4449,9 +4449,9 @@
                 <a:solidFill>
                   <a:srgbClr val="E6EAF2"/>
                 </a:solidFill>
-                <a:latin typeface="나눔고딕코딩"/>
-                <a:ea typeface="나눔고딕코딩"/>
-                <a:cs typeface="나눔고딕코딩"/>
+                <a:latin typeface="D2Coding"/>
+                <a:ea typeface="D2Coding"/>
+                <a:cs typeface="D2Coding"/>
               </a:rPr>
               <a:t>GROUP BY grade;</a:t>
             </a:r>
@@ -4467,9 +4467,9 @@
                 <a:solidFill>
                   <a:srgbClr val="E6EAF2"/>
                 </a:solidFill>
-                <a:latin typeface="나눔고딕코딩"/>
-                <a:ea typeface="나눔고딕코딩"/>
-                <a:cs typeface="나눔고딕코딩"/>
+                <a:latin typeface="D2Coding"/>
+                <a:ea typeface="D2Coding"/>
+                <a:cs typeface="D2Coding"/>
               </a:rPr>
               <a:t>-- ERROR 1055 (42000): Expression #2 of SELECT list is not in GROUP BY clause</a:t>
             </a:r>
@@ -4485,9 +4485,9 @@
                 <a:solidFill>
                   <a:srgbClr val="E6EAF2"/>
                 </a:solidFill>
-                <a:latin typeface="나눔고딕코딩"/>
-                <a:ea typeface="나눔고딕코딩"/>
-                <a:cs typeface="나눔고딕코딩"/>
+                <a:latin typeface="D2Coding"/>
+                <a:ea typeface="D2Coding"/>
+                <a:cs typeface="D2Coding"/>
               </a:rPr>
               <a:t>--   ... only_full_group_by 모드에서 발생</a:t>
             </a:r>
@@ -4503,9 +4503,9 @@
                 <a:solidFill>
                   <a:srgbClr val="E6EAF2"/>
                 </a:solidFill>
-                <a:latin typeface="나눔고딕코딩"/>
-                <a:ea typeface="나눔고딕코딩"/>
-                <a:cs typeface="나눔고딕코딩"/>
+                <a:latin typeface="D2Coding"/>
+                <a:ea typeface="D2Coding"/>
+                <a:cs typeface="D2Coding"/>
               </a:rPr>
               <a:t/>
             </a:r>
@@ -4521,9 +4521,9 @@
                 <a:solidFill>
                   <a:srgbClr val="E6EAF2"/>
                 </a:solidFill>
-                <a:latin typeface="나눔고딕코딩"/>
-                <a:ea typeface="나눔고딕코딩"/>
-                <a:cs typeface="나눔고딕코딩"/>
+                <a:latin typeface="D2Coding"/>
+                <a:ea typeface="D2Coding"/>
+                <a:cs typeface="D2Coding"/>
               </a:rPr>
               <a:t>-- 해결 ① 그룹 기준에 추가</a:t>
             </a:r>
@@ -4539,9 +4539,9 @@
                 <a:solidFill>
                   <a:srgbClr val="E6EAF2"/>
                 </a:solidFill>
-                <a:latin typeface="나눔고딕코딩"/>
-                <a:ea typeface="나눔고딕코딩"/>
-                <a:cs typeface="나눔고딕코딩"/>
+                <a:latin typeface="D2Coding"/>
+                <a:ea typeface="D2Coding"/>
+                <a:cs typeface="D2Coding"/>
               </a:rPr>
               <a:t>SELECT grade, city, COUNT(*) FROM customers GROUP BY grade, city;</a:t>
             </a:r>
@@ -4557,9 +4557,9 @@
                 <a:solidFill>
                   <a:srgbClr val="E6EAF2"/>
                 </a:solidFill>
-                <a:latin typeface="나눔고딕코딩"/>
-                <a:ea typeface="나눔고딕코딩"/>
-                <a:cs typeface="나눔고딕코딩"/>
+                <a:latin typeface="D2Coding"/>
+                <a:ea typeface="D2Coding"/>
+                <a:cs typeface="D2Coding"/>
               </a:rPr>
               <a:t/>
             </a:r>
@@ -4575,9 +4575,9 @@
                 <a:solidFill>
                   <a:srgbClr val="E6EAF2"/>
                 </a:solidFill>
-                <a:latin typeface="나눔고딕코딩"/>
-                <a:ea typeface="나눔고딕코딩"/>
-                <a:cs typeface="나눔고딕코딩"/>
+                <a:latin typeface="D2Coding"/>
+                <a:ea typeface="D2Coding"/>
+                <a:cs typeface="D2Coding"/>
               </a:rPr>
               <a:t>-- 해결 ② 집계 함수로 감싸기</a:t>
             </a:r>
@@ -4593,9 +4593,9 @@
                 <a:solidFill>
                   <a:srgbClr val="E6EAF2"/>
                 </a:solidFill>
-                <a:latin typeface="나눔고딕코딩"/>
-                <a:ea typeface="나눔고딕코딩"/>
-                <a:cs typeface="나눔고딕코딩"/>
+                <a:latin typeface="D2Coding"/>
+                <a:ea typeface="D2Coding"/>
+                <a:cs typeface="D2Coding"/>
               </a:rPr>
               <a:t>SELECT grade, GROUP_CONCAT(name) AS 고객목록, COUNT(*) AS 고객수</a:t>
             </a:r>
@@ -4611,9 +4611,9 @@
                 <a:solidFill>
                   <a:srgbClr val="E6EAF2"/>
                 </a:solidFill>
-                <a:latin typeface="나눔고딕코딩"/>
-                <a:ea typeface="나눔고딕코딩"/>
-                <a:cs typeface="나눔고딕코딩"/>
+                <a:latin typeface="D2Coding"/>
+                <a:ea typeface="D2Coding"/>
+                <a:cs typeface="D2Coding"/>
               </a:rPr>
               <a:t>FROM   customers GROUP BY grade;</a:t>
             </a:r>
@@ -7791,9 +7791,9 @@
                 <a:solidFill>
                   <a:srgbClr val="7A869C"/>
                 </a:solidFill>
-                <a:latin typeface="나눔고딕코딩"/>
-                <a:ea typeface="나눔고딕코딩"/>
-                <a:cs typeface="나눔고딕코딩"/>
+                <a:latin typeface="D2Coding"/>
+                <a:ea typeface="D2Coding"/>
+                <a:cs typeface="D2Coding"/>
               </a:rPr>
               <a:t>1</a:t>
             </a:r>
@@ -7809,9 +7809,9 @@
                 <a:solidFill>
                   <a:srgbClr val="7A869C"/>
                 </a:solidFill>
-                <a:latin typeface="나눔고딕코딩"/>
-                <a:ea typeface="나눔고딕코딩"/>
-                <a:cs typeface="나눔고딕코딩"/>
+                <a:latin typeface="D2Coding"/>
+                <a:ea typeface="D2Coding"/>
+                <a:cs typeface="D2Coding"/>
               </a:rPr>
               <a:t>2</a:t>
             </a:r>
@@ -7827,9 +7827,9 @@
                 <a:solidFill>
                   <a:srgbClr val="7A869C"/>
                 </a:solidFill>
-                <a:latin typeface="나눔고딕코딩"/>
-                <a:ea typeface="나눔고딕코딩"/>
-                <a:cs typeface="나눔고딕코딩"/>
+                <a:latin typeface="D2Coding"/>
+                <a:ea typeface="D2Coding"/>
+                <a:cs typeface="D2Coding"/>
               </a:rPr>
               <a:t>3</a:t>
             </a:r>
@@ -7845,9 +7845,9 @@
                 <a:solidFill>
                   <a:srgbClr val="7A869C"/>
                 </a:solidFill>
-                <a:latin typeface="나눔고딕코딩"/>
-                <a:ea typeface="나눔고딕코딩"/>
-                <a:cs typeface="나눔고딕코딩"/>
+                <a:latin typeface="D2Coding"/>
+                <a:ea typeface="D2Coding"/>
+                <a:cs typeface="D2Coding"/>
               </a:rPr>
               <a:t>4</a:t>
             </a:r>
@@ -7863,9 +7863,9 @@
                 <a:solidFill>
                   <a:srgbClr val="7A869C"/>
                 </a:solidFill>
-                <a:latin typeface="나눔고딕코딩"/>
-                <a:ea typeface="나눔고딕코딩"/>
-                <a:cs typeface="나눔고딕코딩"/>
+                <a:latin typeface="D2Coding"/>
+                <a:ea typeface="D2Coding"/>
+                <a:cs typeface="D2Coding"/>
               </a:rPr>
               <a:t>5</a:t>
             </a:r>
@@ -7881,9 +7881,9 @@
                 <a:solidFill>
                   <a:srgbClr val="7A869C"/>
                 </a:solidFill>
-                <a:latin typeface="나눔고딕코딩"/>
-                <a:ea typeface="나눔고딕코딩"/>
-                <a:cs typeface="나눔고딕코딩"/>
+                <a:latin typeface="D2Coding"/>
+                <a:ea typeface="D2Coding"/>
+                <a:cs typeface="D2Coding"/>
               </a:rPr>
               <a:t>6</a:t>
             </a:r>
@@ -7899,9 +7899,9 @@
                 <a:solidFill>
                   <a:srgbClr val="7A869C"/>
                 </a:solidFill>
-                <a:latin typeface="나눔고딕코딩"/>
-                <a:ea typeface="나눔고딕코딩"/>
-                <a:cs typeface="나눔고딕코딩"/>
+                <a:latin typeface="D2Coding"/>
+                <a:ea typeface="D2Coding"/>
+                <a:cs typeface="D2Coding"/>
               </a:rPr>
               <a:t>7</a:t>
             </a:r>
@@ -7917,9 +7917,9 @@
                 <a:solidFill>
                   <a:srgbClr val="7A869C"/>
                 </a:solidFill>
-                <a:latin typeface="나눔고딕코딩"/>
-                <a:ea typeface="나눔고딕코딩"/>
-                <a:cs typeface="나눔고딕코딩"/>
+                <a:latin typeface="D2Coding"/>
+                <a:ea typeface="D2Coding"/>
+                <a:cs typeface="D2Coding"/>
               </a:rPr>
               <a:t>8</a:t>
             </a:r>
@@ -7935,9 +7935,9 @@
                 <a:solidFill>
                   <a:srgbClr val="7A869C"/>
                 </a:solidFill>
-                <a:latin typeface="나눔고딕코딩"/>
-                <a:ea typeface="나눔고딕코딩"/>
-                <a:cs typeface="나눔고딕코딩"/>
+                <a:latin typeface="D2Coding"/>
+                <a:ea typeface="D2Coding"/>
+                <a:cs typeface="D2Coding"/>
               </a:rPr>
               <a:t>9</a:t>
             </a:r>
@@ -7976,9 +7976,9 @@
                 <a:solidFill>
                   <a:srgbClr val="E6EAF2"/>
                 </a:solidFill>
-                <a:latin typeface="나눔고딕코딩"/>
-                <a:ea typeface="나눔고딕코딩"/>
-                <a:cs typeface="나눔고딕코딩"/>
+                <a:latin typeface="D2Coding"/>
+                <a:ea typeface="D2Coding"/>
+                <a:cs typeface="D2Coding"/>
               </a:rPr>
               <a:t>SELECT order_id,</a:t>
             </a:r>
@@ -7994,9 +7994,9 @@
                 <a:solidFill>
                   <a:srgbClr val="E6EAF2"/>
                 </a:solidFill>
-                <a:latin typeface="나눔고딕코딩"/>
-                <a:ea typeface="나눔고딕코딩"/>
-                <a:cs typeface="나눔고딕코딩"/>
+                <a:latin typeface="D2Coding"/>
+                <a:ea typeface="D2Coding"/>
+                <a:cs typeface="D2Coding"/>
               </a:rPr>
               <a:t>       SUM(qty * unit_price) AS 결제금액</a:t>
             </a:r>
@@ -8012,9 +8012,9 @@
                 <a:solidFill>
                   <a:srgbClr val="E6EAF2"/>
                 </a:solidFill>
-                <a:latin typeface="나눔고딕코딩"/>
-                <a:ea typeface="나눔고딕코딩"/>
-                <a:cs typeface="나눔고딕코딩"/>
+                <a:latin typeface="D2Coding"/>
+                <a:ea typeface="D2Coding"/>
+                <a:cs typeface="D2Coding"/>
               </a:rPr>
               <a:t>FROM   order_items</a:t>
             </a:r>
@@ -8030,9 +8030,9 @@
                 <a:solidFill>
                   <a:srgbClr val="E6EAF2"/>
                 </a:solidFill>
-                <a:latin typeface="나눔고딕코딩"/>
-                <a:ea typeface="나눔고딕코딩"/>
-                <a:cs typeface="나눔고딕코딩"/>
+                <a:latin typeface="D2Coding"/>
+                <a:ea typeface="D2Coding"/>
+                <a:cs typeface="D2Coding"/>
               </a:rPr>
               <a:t>GROUP BY order_id</a:t>
             </a:r>
@@ -8048,9 +8048,9 @@
                 <a:solidFill>
                   <a:srgbClr val="E6EAF2"/>
                 </a:solidFill>
-                <a:latin typeface="나눔고딕코딩"/>
-                <a:ea typeface="나눔고딕코딩"/>
-                <a:cs typeface="나눔고딕코딩"/>
+                <a:latin typeface="D2Coding"/>
+                <a:ea typeface="D2Coding"/>
+                <a:cs typeface="D2Coding"/>
               </a:rPr>
               <a:t>HAVING SUM(qty * unit_price) &gt;= 100000;</a:t>
             </a:r>
@@ -8066,9 +8066,9 @@
                 <a:solidFill>
                   <a:srgbClr val="E6EAF2"/>
                 </a:solidFill>
-                <a:latin typeface="나눔고딕코딩"/>
-                <a:ea typeface="나눔고딕코딩"/>
-                <a:cs typeface="나눔고딕코딩"/>
+                <a:latin typeface="D2Coding"/>
+                <a:ea typeface="D2Coding"/>
+                <a:cs typeface="D2Coding"/>
               </a:rPr>
               <a:t>-- 결과: 1003(189000), 1008(114000), 1010(226000)</a:t>
             </a:r>
@@ -8084,9 +8084,9 @@
                 <a:solidFill>
                   <a:srgbClr val="E6EAF2"/>
                 </a:solidFill>
-                <a:latin typeface="나눔고딕코딩"/>
-                <a:ea typeface="나눔고딕코딩"/>
-                <a:cs typeface="나눔고딕코딩"/>
+                <a:latin typeface="D2Coding"/>
+                <a:ea typeface="D2Coding"/>
+                <a:cs typeface="D2Coding"/>
               </a:rPr>
               <a:t/>
             </a:r>
@@ -8102,9 +8102,9 @@
                 <a:solidFill>
                   <a:srgbClr val="E6EAF2"/>
                 </a:solidFill>
-                <a:latin typeface="나눔고딕코딩"/>
-                <a:ea typeface="나눔고딕코딩"/>
-                <a:cs typeface="나눔고딕코딩"/>
+                <a:latin typeface="D2Coding"/>
+                <a:ea typeface="D2Coding"/>
+                <a:cs typeface="D2Coding"/>
               </a:rPr>
               <a:t>SELECT order_id, COUNT(*) AS 상품종수 FROM order_items</a:t>
             </a:r>
@@ -8120,9 +8120,9 @@
                 <a:solidFill>
                   <a:srgbClr val="E6EAF2"/>
                 </a:solidFill>
-                <a:latin typeface="나눔고딕코딩"/>
-                <a:ea typeface="나눔고딕코딩"/>
-                <a:cs typeface="나눔고딕코딩"/>
+                <a:latin typeface="D2Coding"/>
+                <a:ea typeface="D2Coding"/>
+                <a:cs typeface="D2Coding"/>
               </a:rPr>
               <a:t>GROUP BY order_id HAVING COUNT(*) &gt;= 2;</a:t>
             </a:r>
@@ -9705,9 +9705,9 @@
                 <a:solidFill>
                   <a:srgbClr val="7A869C"/>
                 </a:solidFill>
-                <a:latin typeface="나눔고딕코딩"/>
-                <a:ea typeface="나눔고딕코딩"/>
-                <a:cs typeface="나눔고딕코딩"/>
+                <a:latin typeface="D2Coding"/>
+                <a:ea typeface="D2Coding"/>
+                <a:cs typeface="D2Coding"/>
               </a:rPr>
               <a:t>1</a:t>
             </a:r>
@@ -9723,9 +9723,9 @@
                 <a:solidFill>
                   <a:srgbClr val="7A869C"/>
                 </a:solidFill>
-                <a:latin typeface="나눔고딕코딩"/>
-                <a:ea typeface="나눔고딕코딩"/>
-                <a:cs typeface="나눔고딕코딩"/>
+                <a:latin typeface="D2Coding"/>
+                <a:ea typeface="D2Coding"/>
+                <a:cs typeface="D2Coding"/>
               </a:rPr>
               <a:t>2</a:t>
             </a:r>
@@ -9741,9 +9741,9 @@
                 <a:solidFill>
                   <a:srgbClr val="7A869C"/>
                 </a:solidFill>
-                <a:latin typeface="나눔고딕코딩"/>
-                <a:ea typeface="나눔고딕코딩"/>
-                <a:cs typeface="나눔고딕코딩"/>
+                <a:latin typeface="D2Coding"/>
+                <a:ea typeface="D2Coding"/>
+                <a:cs typeface="D2Coding"/>
               </a:rPr>
               <a:t>3</a:t>
             </a:r>
@@ -9782,9 +9782,9 @@
                 <a:solidFill>
                   <a:srgbClr val="E6EAF2"/>
                 </a:solidFill>
-                <a:latin typeface="나눔고딕코딩"/>
-                <a:ea typeface="나눔고딕코딩"/>
-                <a:cs typeface="나눔고딕코딩"/>
+                <a:latin typeface="D2Coding"/>
+                <a:ea typeface="D2Coding"/>
+                <a:cs typeface="D2Coding"/>
               </a:rPr>
               <a:t>SELECT order_id, SUM(qty * unit_price) FROM order_items</a:t>
             </a:r>
@@ -9800,9 +9800,9 @@
                 <a:solidFill>
                   <a:srgbClr val="E6EAF2"/>
                 </a:solidFill>
-                <a:latin typeface="나눔고딕코딩"/>
-                <a:ea typeface="나눔고딕코딩"/>
-                <a:cs typeface="나눔고딕코딩"/>
+                <a:latin typeface="D2Coding"/>
+                <a:ea typeface="D2Coding"/>
+                <a:cs typeface="D2Coding"/>
               </a:rPr>
               <a:t>WHERE  SUM(qty * unit_price) &gt;= 100000 GROUP BY order_id;</a:t>
             </a:r>
@@ -9818,9 +9818,9 @@
                 <a:solidFill>
                   <a:srgbClr val="E6EAF2"/>
                 </a:solidFill>
-                <a:latin typeface="나눔고딕코딩"/>
-                <a:ea typeface="나눔고딕코딩"/>
-                <a:cs typeface="나눔고딕코딩"/>
+                <a:latin typeface="D2Coding"/>
+                <a:ea typeface="D2Coding"/>
+                <a:cs typeface="D2Coding"/>
               </a:rPr>
               <a:t>-- (X) ERROR 1111: Invalid use of group function</a:t>
             </a:r>
@@ -10052,9 +10052,9 @@
                 <a:solidFill>
                   <a:srgbClr val="7A869C"/>
                 </a:solidFill>
-                <a:latin typeface="나눔고딕코딩"/>
-                <a:ea typeface="나눔고딕코딩"/>
-                <a:cs typeface="나눔고딕코딩"/>
+                <a:latin typeface="D2Coding"/>
+                <a:ea typeface="D2Coding"/>
+                <a:cs typeface="D2Coding"/>
               </a:rPr>
               <a:t>1</a:t>
             </a:r>
@@ -10070,9 +10070,9 @@
                 <a:solidFill>
                   <a:srgbClr val="7A869C"/>
                 </a:solidFill>
-                <a:latin typeface="나눔고딕코딩"/>
-                <a:ea typeface="나눔고딕코딩"/>
-                <a:cs typeface="나눔고딕코딩"/>
+                <a:latin typeface="D2Coding"/>
+                <a:ea typeface="D2Coding"/>
+                <a:cs typeface="D2Coding"/>
               </a:rPr>
               <a:t>2</a:t>
             </a:r>
@@ -10088,9 +10088,9 @@
                 <a:solidFill>
                   <a:srgbClr val="7A869C"/>
                 </a:solidFill>
-                <a:latin typeface="나눔고딕코딩"/>
-                <a:ea typeface="나눔고딕코딩"/>
-                <a:cs typeface="나눔고딕코딩"/>
+                <a:latin typeface="D2Coding"/>
+                <a:ea typeface="D2Coding"/>
+                <a:cs typeface="D2Coding"/>
               </a:rPr>
               <a:t>3</a:t>
             </a:r>
@@ -10106,9 +10106,9 @@
                 <a:solidFill>
                   <a:srgbClr val="7A869C"/>
                 </a:solidFill>
-                <a:latin typeface="나눔고딕코딩"/>
-                <a:ea typeface="나눔고딕코딩"/>
-                <a:cs typeface="나눔고딕코딩"/>
+                <a:latin typeface="D2Coding"/>
+                <a:ea typeface="D2Coding"/>
+                <a:cs typeface="D2Coding"/>
               </a:rPr>
               <a:t>4</a:t>
             </a:r>
@@ -10147,9 +10147,9 @@
                 <a:solidFill>
                   <a:srgbClr val="E6EAF2"/>
                 </a:solidFill>
-                <a:latin typeface="나눔고딕코딩"/>
-                <a:ea typeface="나눔고딕코딩"/>
-                <a:cs typeface="나눔고딕코딩"/>
+                <a:latin typeface="D2Coding"/>
+                <a:ea typeface="D2Coding"/>
+                <a:cs typeface="D2Coding"/>
               </a:rPr>
               <a:t>SELECT order_id, SUM(qty * unit_price) AS 결제금액</a:t>
             </a:r>
@@ -10165,9 +10165,9 @@
                 <a:solidFill>
                   <a:srgbClr val="E6EAF2"/>
                 </a:solidFill>
-                <a:latin typeface="나눔고딕코딩"/>
-                <a:ea typeface="나눔고딕코딩"/>
-                <a:cs typeface="나눔고딕코딩"/>
+                <a:latin typeface="D2Coding"/>
+                <a:ea typeface="D2Coding"/>
+                <a:cs typeface="D2Coding"/>
               </a:rPr>
               <a:t>FROM   order_items</a:t>
             </a:r>
@@ -10183,9 +10183,9 @@
                 <a:solidFill>
                   <a:srgbClr val="E6EAF2"/>
                 </a:solidFill>
-                <a:latin typeface="나눔고딕코딩"/>
-                <a:ea typeface="나눔고딕코딩"/>
-                <a:cs typeface="나눔고딕코딩"/>
+                <a:latin typeface="D2Coding"/>
+                <a:ea typeface="D2Coding"/>
+                <a:cs typeface="D2Coding"/>
               </a:rPr>
               <a:t>GROUP BY order_id</a:t>
             </a:r>
@@ -10201,9 +10201,9 @@
                 <a:solidFill>
                   <a:srgbClr val="E6EAF2"/>
                 </a:solidFill>
-                <a:latin typeface="나눔고딕코딩"/>
-                <a:ea typeface="나눔고딕코딩"/>
-                <a:cs typeface="나눔고딕코딩"/>
+                <a:latin typeface="D2Coding"/>
+                <a:ea typeface="D2Coding"/>
+                <a:cs typeface="D2Coding"/>
               </a:rPr>
               <a:t>HAVING SUM(qty * unit_price) &gt;= 100000;</a:t>
             </a:r>
@@ -10737,9 +10737,9 @@
                 <a:solidFill>
                   <a:srgbClr val="7A869C"/>
                 </a:solidFill>
-                <a:latin typeface="나눔고딕코딩"/>
-                <a:ea typeface="나눔고딕코딩"/>
-                <a:cs typeface="나눔고딕코딩"/>
+                <a:latin typeface="D2Coding"/>
+                <a:ea typeface="D2Coding"/>
+                <a:cs typeface="D2Coding"/>
               </a:rPr>
               <a:t>1</a:t>
             </a:r>
@@ -10755,9 +10755,9 @@
                 <a:solidFill>
                   <a:srgbClr val="7A869C"/>
                 </a:solidFill>
-                <a:latin typeface="나눔고딕코딩"/>
-                <a:ea typeface="나눔고딕코딩"/>
-                <a:cs typeface="나눔고딕코딩"/>
+                <a:latin typeface="D2Coding"/>
+                <a:ea typeface="D2Coding"/>
+                <a:cs typeface="D2Coding"/>
               </a:rPr>
               <a:t>2</a:t>
             </a:r>
@@ -10773,9 +10773,9 @@
                 <a:solidFill>
                   <a:srgbClr val="7A869C"/>
                 </a:solidFill>
-                <a:latin typeface="나눔고딕코딩"/>
-                <a:ea typeface="나눔고딕코딩"/>
-                <a:cs typeface="나눔고딕코딩"/>
+                <a:latin typeface="D2Coding"/>
+                <a:ea typeface="D2Coding"/>
+                <a:cs typeface="D2Coding"/>
               </a:rPr>
               <a:t>3</a:t>
             </a:r>
@@ -10791,9 +10791,9 @@
                 <a:solidFill>
                   <a:srgbClr val="7A869C"/>
                 </a:solidFill>
-                <a:latin typeface="나눔고딕코딩"/>
-                <a:ea typeface="나눔고딕코딩"/>
-                <a:cs typeface="나눔고딕코딩"/>
+                <a:latin typeface="D2Coding"/>
+                <a:ea typeface="D2Coding"/>
+                <a:cs typeface="D2Coding"/>
               </a:rPr>
               <a:t>4</a:t>
             </a:r>
@@ -10809,9 +10809,9 @@
                 <a:solidFill>
                   <a:srgbClr val="7A869C"/>
                 </a:solidFill>
-                <a:latin typeface="나눔고딕코딩"/>
-                <a:ea typeface="나눔고딕코딩"/>
-                <a:cs typeface="나눔고딕코딩"/>
+                <a:latin typeface="D2Coding"/>
+                <a:ea typeface="D2Coding"/>
+                <a:cs typeface="D2Coding"/>
               </a:rPr>
               <a:t>5</a:t>
             </a:r>
@@ -10827,9 +10827,9 @@
                 <a:solidFill>
                   <a:srgbClr val="7A869C"/>
                 </a:solidFill>
-                <a:latin typeface="나눔고딕코딩"/>
-                <a:ea typeface="나눔고딕코딩"/>
-                <a:cs typeface="나눔고딕코딩"/>
+                <a:latin typeface="D2Coding"/>
+                <a:ea typeface="D2Coding"/>
+                <a:cs typeface="D2Coding"/>
               </a:rPr>
               <a:t>6</a:t>
             </a:r>
@@ -10845,9 +10845,9 @@
                 <a:solidFill>
                   <a:srgbClr val="7A869C"/>
                 </a:solidFill>
-                <a:latin typeface="나눔고딕코딩"/>
-                <a:ea typeface="나눔고딕코딩"/>
-                <a:cs typeface="나눔고딕코딩"/>
+                <a:latin typeface="D2Coding"/>
+                <a:ea typeface="D2Coding"/>
+                <a:cs typeface="D2Coding"/>
               </a:rPr>
               <a:t>7</a:t>
             </a:r>
@@ -10863,9 +10863,9 @@
                 <a:solidFill>
                   <a:srgbClr val="7A869C"/>
                 </a:solidFill>
-                <a:latin typeface="나눔고딕코딩"/>
-                <a:ea typeface="나눔고딕코딩"/>
-                <a:cs typeface="나눔고딕코딩"/>
+                <a:latin typeface="D2Coding"/>
+                <a:ea typeface="D2Coding"/>
+                <a:cs typeface="D2Coding"/>
               </a:rPr>
               <a:t>8</a:t>
             </a:r>
@@ -10904,9 +10904,9 @@
                 <a:solidFill>
                   <a:srgbClr val="E6EAF2"/>
                 </a:solidFill>
-                <a:latin typeface="나눔고딕코딩"/>
-                <a:ea typeface="나눔고딕코딩"/>
-                <a:cs typeface="나눔고딕코딩"/>
+                <a:latin typeface="D2Coding"/>
+                <a:ea typeface="D2Coding"/>
+                <a:cs typeface="D2Coding"/>
               </a:rPr>
               <a:t>-- 절을 쓰는 순서와 실제 실행 순서는 다르다 — 번호(①~⑦)가 실행 순서</a:t>
             </a:r>
@@ -10922,9 +10922,9 @@
                 <a:solidFill>
                   <a:srgbClr val="E6EAF2"/>
                 </a:solidFill>
-                <a:latin typeface="나눔고딕코딩"/>
-                <a:ea typeface="나눔고딕코딩"/>
-                <a:cs typeface="나눔고딕코딩"/>
+                <a:latin typeface="D2Coding"/>
+                <a:ea typeface="D2Coding"/>
+                <a:cs typeface="D2Coding"/>
               </a:rPr>
               <a:t>SELECT   grade, COUNT(*) AS cnt          -- ⑤ 결과 컬럼 생성, 별칭 부여</a:t>
             </a:r>
@@ -10940,9 +10940,9 @@
                 <a:solidFill>
                   <a:srgbClr val="E6EAF2"/>
                 </a:solidFill>
-                <a:latin typeface="나눔고딕코딩"/>
-                <a:ea typeface="나눔고딕코딩"/>
-                <a:cs typeface="나눔고딕코딩"/>
+                <a:latin typeface="D2Coding"/>
+                <a:ea typeface="D2Coding"/>
+                <a:cs typeface="D2Coding"/>
               </a:rPr>
               <a:t>FROM     customers                       -- ① 테이블에서 행을 읽음</a:t>
             </a:r>
@@ -10958,9 +10958,9 @@
                 <a:solidFill>
                   <a:srgbClr val="E6EAF2"/>
                 </a:solidFill>
-                <a:latin typeface="나눔고딕코딩"/>
-                <a:ea typeface="나눔고딕코딩"/>
-                <a:cs typeface="나눔고딕코딩"/>
+                <a:latin typeface="D2Coding"/>
+                <a:ea typeface="D2Coding"/>
+                <a:cs typeface="D2Coding"/>
               </a:rPr>
               <a:t>WHERE    city IS NOT NULL                -- ② 조건에 맞는 행만 남김</a:t>
             </a:r>
@@ -10976,9 +10976,9 @@
                 <a:solidFill>
                   <a:srgbClr val="E6EAF2"/>
                 </a:solidFill>
-                <a:latin typeface="나눔고딕코딩"/>
-                <a:ea typeface="나눔고딕코딩"/>
-                <a:cs typeface="나눔고딕코딩"/>
+                <a:latin typeface="D2Coding"/>
+                <a:ea typeface="D2Coding"/>
+                <a:cs typeface="D2Coding"/>
               </a:rPr>
               <a:t>GROUP BY grade                           -- ③ grade 값이 같은 행끼리 묶음</a:t>
             </a:r>
@@ -10994,9 +10994,9 @@
                 <a:solidFill>
                   <a:srgbClr val="E6EAF2"/>
                 </a:solidFill>
-                <a:latin typeface="나눔고딕코딩"/>
-                <a:ea typeface="나눔고딕코딩"/>
-                <a:cs typeface="나눔고딕코딩"/>
+                <a:latin typeface="D2Coding"/>
+                <a:ea typeface="D2Coding"/>
+                <a:cs typeface="D2Coding"/>
               </a:rPr>
               <a:t>HAVING   COUNT(*) &gt;= 2                   -- ④ 2명 이상인 그룹만 남김</a:t>
             </a:r>
@@ -11012,9 +11012,9 @@
                 <a:solidFill>
                   <a:srgbClr val="E6EAF2"/>
                 </a:solidFill>
-                <a:latin typeface="나눔고딕코딩"/>
-                <a:ea typeface="나눔고딕코딩"/>
-                <a:cs typeface="나눔고딕코딩"/>
+                <a:latin typeface="D2Coding"/>
+                <a:ea typeface="D2Coding"/>
+                <a:cs typeface="D2Coding"/>
               </a:rPr>
               <a:t>ORDER BY cnt DESC                        -- ⑥ 정렬 (별칭 사용 가능)</a:t>
             </a:r>
@@ -11030,9 +11030,9 @@
                 <a:solidFill>
                   <a:srgbClr val="E6EAF2"/>
                 </a:solidFill>
-                <a:latin typeface="나눔고딕코딩"/>
-                <a:ea typeface="나눔고딕코딩"/>
-                <a:cs typeface="나눔고딕코딩"/>
+                <a:latin typeface="D2Coding"/>
+                <a:ea typeface="D2Coding"/>
+                <a:cs typeface="D2Coding"/>
               </a:rPr>
               <a:t>LIMIT    3;                              -- ⑦ 상위 3건</a:t>
             </a:r>
@@ -15902,9 +15902,9 @@
                 <a:solidFill>
                   <a:srgbClr val="7A869C"/>
                 </a:solidFill>
-                <a:latin typeface="나눔고딕코딩"/>
-                <a:ea typeface="나눔고딕코딩"/>
-                <a:cs typeface="나눔고딕코딩"/>
+                <a:latin typeface="D2Coding"/>
+                <a:ea typeface="D2Coding"/>
+                <a:cs typeface="D2Coding"/>
               </a:rPr>
               <a:t>1</a:t>
             </a:r>
@@ -15920,9 +15920,9 @@
                 <a:solidFill>
                   <a:srgbClr val="7A869C"/>
                 </a:solidFill>
-                <a:latin typeface="나눔고딕코딩"/>
-                <a:ea typeface="나눔고딕코딩"/>
-                <a:cs typeface="나눔고딕코딩"/>
+                <a:latin typeface="D2Coding"/>
+                <a:ea typeface="D2Coding"/>
+                <a:cs typeface="D2Coding"/>
               </a:rPr>
               <a:t>2</a:t>
             </a:r>
@@ -15938,9 +15938,9 @@
                 <a:solidFill>
                   <a:srgbClr val="7A869C"/>
                 </a:solidFill>
-                <a:latin typeface="나눔고딕코딩"/>
-                <a:ea typeface="나눔고딕코딩"/>
-                <a:cs typeface="나눔고딕코딩"/>
+                <a:latin typeface="D2Coding"/>
+                <a:ea typeface="D2Coding"/>
+                <a:cs typeface="D2Coding"/>
               </a:rPr>
               <a:t>3</a:t>
             </a:r>
@@ -15956,9 +15956,9 @@
                 <a:solidFill>
                   <a:srgbClr val="7A869C"/>
                 </a:solidFill>
-                <a:latin typeface="나눔고딕코딩"/>
-                <a:ea typeface="나눔고딕코딩"/>
-                <a:cs typeface="나눔고딕코딩"/>
+                <a:latin typeface="D2Coding"/>
+                <a:ea typeface="D2Coding"/>
+                <a:cs typeface="D2Coding"/>
               </a:rPr>
               <a:t>4</a:t>
             </a:r>
@@ -15974,9 +15974,9 @@
                 <a:solidFill>
                   <a:srgbClr val="7A869C"/>
                 </a:solidFill>
-                <a:latin typeface="나눔고딕코딩"/>
-                <a:ea typeface="나눔고딕코딩"/>
-                <a:cs typeface="나눔고딕코딩"/>
+                <a:latin typeface="D2Coding"/>
+                <a:ea typeface="D2Coding"/>
+                <a:cs typeface="D2Coding"/>
               </a:rPr>
               <a:t>5</a:t>
             </a:r>
@@ -15992,9 +15992,9 @@
                 <a:solidFill>
                   <a:srgbClr val="7A869C"/>
                 </a:solidFill>
-                <a:latin typeface="나눔고딕코딩"/>
-                <a:ea typeface="나눔고딕코딩"/>
-                <a:cs typeface="나눔고딕코딩"/>
+                <a:latin typeface="D2Coding"/>
+                <a:ea typeface="D2Coding"/>
+                <a:cs typeface="D2Coding"/>
               </a:rPr>
               <a:t>6</a:t>
             </a:r>
@@ -16010,9 +16010,9 @@
                 <a:solidFill>
                   <a:srgbClr val="7A869C"/>
                 </a:solidFill>
-                <a:latin typeface="나눔고딕코딩"/>
-                <a:ea typeface="나눔고딕코딩"/>
-                <a:cs typeface="나눔고딕코딩"/>
+                <a:latin typeface="D2Coding"/>
+                <a:ea typeface="D2Coding"/>
+                <a:cs typeface="D2Coding"/>
               </a:rPr>
               <a:t>7</a:t>
             </a:r>
@@ -16028,9 +16028,9 @@
                 <a:solidFill>
                   <a:srgbClr val="7A869C"/>
                 </a:solidFill>
-                <a:latin typeface="나눔고딕코딩"/>
-                <a:ea typeface="나눔고딕코딩"/>
-                <a:cs typeface="나눔고딕코딩"/>
+                <a:latin typeface="D2Coding"/>
+                <a:ea typeface="D2Coding"/>
+                <a:cs typeface="D2Coding"/>
               </a:rPr>
               <a:t>8</a:t>
             </a:r>
@@ -16046,9 +16046,9 @@
                 <a:solidFill>
                   <a:srgbClr val="7A869C"/>
                 </a:solidFill>
-                <a:latin typeface="나눔고딕코딩"/>
-                <a:ea typeface="나눔고딕코딩"/>
-                <a:cs typeface="나눔고딕코딩"/>
+                <a:latin typeface="D2Coding"/>
+                <a:ea typeface="D2Coding"/>
+                <a:cs typeface="D2Coding"/>
               </a:rPr>
               <a:t>9</a:t>
             </a:r>
@@ -16064,9 +16064,9 @@
                 <a:solidFill>
                   <a:srgbClr val="7A869C"/>
                 </a:solidFill>
-                <a:latin typeface="나눔고딕코딩"/>
-                <a:ea typeface="나눔고딕코딩"/>
-                <a:cs typeface="나눔고딕코딩"/>
+                <a:latin typeface="D2Coding"/>
+                <a:ea typeface="D2Coding"/>
+                <a:cs typeface="D2Coding"/>
               </a:rPr>
               <a:t>10</a:t>
             </a:r>
@@ -16082,9 +16082,9 @@
                 <a:solidFill>
                   <a:srgbClr val="7A869C"/>
                 </a:solidFill>
-                <a:latin typeface="나눔고딕코딩"/>
-                <a:ea typeface="나눔고딕코딩"/>
-                <a:cs typeface="나눔고딕코딩"/>
+                <a:latin typeface="D2Coding"/>
+                <a:ea typeface="D2Coding"/>
+                <a:cs typeface="D2Coding"/>
               </a:rPr>
               <a:t>11</a:t>
             </a:r>
@@ -16100,9 +16100,9 @@
                 <a:solidFill>
                   <a:srgbClr val="7A869C"/>
                 </a:solidFill>
-                <a:latin typeface="나눔고딕코딩"/>
-                <a:ea typeface="나눔고딕코딩"/>
-                <a:cs typeface="나눔고딕코딩"/>
+                <a:latin typeface="D2Coding"/>
+                <a:ea typeface="D2Coding"/>
+                <a:cs typeface="D2Coding"/>
               </a:rPr>
               <a:t>12</a:t>
             </a:r>
@@ -16118,9 +16118,9 @@
                 <a:solidFill>
                   <a:srgbClr val="7A869C"/>
                 </a:solidFill>
-                <a:latin typeface="나눔고딕코딩"/>
-                <a:ea typeface="나눔고딕코딩"/>
-                <a:cs typeface="나눔고딕코딩"/>
+                <a:latin typeface="D2Coding"/>
+                <a:ea typeface="D2Coding"/>
+                <a:cs typeface="D2Coding"/>
               </a:rPr>
               <a:t>13</a:t>
             </a:r>
@@ -16159,9 +16159,9 @@
                 <a:solidFill>
                   <a:srgbClr val="E6EAF2"/>
                 </a:solidFill>
-                <a:latin typeface="나눔고딕코딩"/>
-                <a:ea typeface="나눔고딕코딩"/>
-                <a:cs typeface="나눔고딕코딩"/>
+                <a:latin typeface="D2Coding"/>
+                <a:ea typeface="D2Coding"/>
+                <a:cs typeface="D2Coding"/>
               </a:rPr>
               <a:t>SELECT DATE_FORMAT(order_date, '%Y-%m') AS 주문월,</a:t>
             </a:r>
@@ -16177,9 +16177,9 @@
                 <a:solidFill>
                   <a:srgbClr val="E6EAF2"/>
                 </a:solidFill>
-                <a:latin typeface="나눔고딕코딩"/>
-                <a:ea typeface="나눔고딕코딩"/>
-                <a:cs typeface="나눔고딕코딩"/>
+                <a:latin typeface="D2Coding"/>
+                <a:ea typeface="D2Coding"/>
+                <a:cs typeface="D2Coding"/>
               </a:rPr>
               <a:t>       COUNT(*)                         AS 주문건수</a:t>
             </a:r>
@@ -16195,9 +16195,9 @@
                 <a:solidFill>
                   <a:srgbClr val="E6EAF2"/>
                 </a:solidFill>
-                <a:latin typeface="나눔고딕코딩"/>
-                <a:ea typeface="나눔고딕코딩"/>
-                <a:cs typeface="나눔고딕코딩"/>
+                <a:latin typeface="D2Coding"/>
+                <a:ea typeface="D2Coding"/>
+                <a:cs typeface="D2Coding"/>
               </a:rPr>
               <a:t>FROM   orders</a:t>
             </a:r>
@@ -16213,9 +16213,9 @@
                 <a:solidFill>
                   <a:srgbClr val="E6EAF2"/>
                 </a:solidFill>
-                <a:latin typeface="나눔고딕코딩"/>
-                <a:ea typeface="나눔고딕코딩"/>
-                <a:cs typeface="나눔고딕코딩"/>
+                <a:latin typeface="D2Coding"/>
+                <a:ea typeface="D2Coding"/>
+                <a:cs typeface="D2Coding"/>
               </a:rPr>
               <a:t>WHERE  status &lt;&gt; '취소'</a:t>
             </a:r>
@@ -16231,9 +16231,9 @@
                 <a:solidFill>
                   <a:srgbClr val="E6EAF2"/>
                 </a:solidFill>
-                <a:latin typeface="나눔고딕코딩"/>
-                <a:ea typeface="나눔고딕코딩"/>
-                <a:cs typeface="나눔고딕코딩"/>
+                <a:latin typeface="D2Coding"/>
+                <a:ea typeface="D2Coding"/>
+                <a:cs typeface="D2Coding"/>
               </a:rPr>
               <a:t>GROUP BY DATE_FORMAT(order_date, '%Y-%m')</a:t>
             </a:r>
@@ -16249,9 +16249,9 @@
                 <a:solidFill>
                   <a:srgbClr val="E6EAF2"/>
                 </a:solidFill>
-                <a:latin typeface="나눔고딕코딩"/>
-                <a:ea typeface="나눔고딕코딩"/>
-                <a:cs typeface="나눔고딕코딩"/>
+                <a:latin typeface="D2Coding"/>
+                <a:ea typeface="D2Coding"/>
+                <a:cs typeface="D2Coding"/>
               </a:rPr>
               <a:t>ORDER BY 주문월;</a:t>
             </a:r>
@@ -16267,9 +16267,9 @@
                 <a:solidFill>
                   <a:srgbClr val="E6EAF2"/>
                 </a:solidFill>
-                <a:latin typeface="나눔고딕코딩"/>
-                <a:ea typeface="나눔고딕코딩"/>
-                <a:cs typeface="나눔고딕코딩"/>
+                <a:latin typeface="D2Coding"/>
+                <a:ea typeface="D2Coding"/>
+                <a:cs typeface="D2Coding"/>
               </a:rPr>
               <a:t>/* 결과</a:t>
             </a:r>
@@ -16285,9 +16285,9 @@
                 <a:solidFill>
                   <a:srgbClr val="E6EAF2"/>
                 </a:solidFill>
-                <a:latin typeface="나눔고딕코딩"/>
-                <a:ea typeface="나눔고딕코딩"/>
-                <a:cs typeface="나눔고딕코딩"/>
+                <a:latin typeface="D2Coding"/>
+                <a:ea typeface="D2Coding"/>
+                <a:cs typeface="D2Coding"/>
               </a:rPr>
               <a:t>   2026-01  2</a:t>
             </a:r>
@@ -16303,9 +16303,9 @@
                 <a:solidFill>
                   <a:srgbClr val="E6EAF2"/>
                 </a:solidFill>
-                <a:latin typeface="나눔고딕코딩"/>
-                <a:ea typeface="나눔고딕코딩"/>
-                <a:cs typeface="나눔고딕코딩"/>
+                <a:latin typeface="D2Coding"/>
+                <a:ea typeface="D2Coding"/>
+                <a:cs typeface="D2Coding"/>
               </a:rPr>
               <a:t>   2026-02  2   ← 취소된 1005가 빠져 3건이 아니라 2건</a:t>
             </a:r>
@@ -16321,9 +16321,9 @@
                 <a:solidFill>
                   <a:srgbClr val="E6EAF2"/>
                 </a:solidFill>
-                <a:latin typeface="나눔고딕코딩"/>
-                <a:ea typeface="나눔고딕코딩"/>
-                <a:cs typeface="나눔고딕코딩"/>
+                <a:latin typeface="D2Coding"/>
+                <a:ea typeface="D2Coding"/>
+                <a:cs typeface="D2Coding"/>
               </a:rPr>
               <a:t>   2026-03  3</a:t>
             </a:r>
@@ -16339,9 +16339,9 @@
                 <a:solidFill>
                   <a:srgbClr val="E6EAF2"/>
                 </a:solidFill>
-                <a:latin typeface="나눔고딕코딩"/>
-                <a:ea typeface="나눔고딕코딩"/>
-                <a:cs typeface="나눔고딕코딩"/>
+                <a:latin typeface="D2Coding"/>
+                <a:ea typeface="D2Coding"/>
+                <a:cs typeface="D2Coding"/>
               </a:rPr>
               <a:t>   2026-04  2</a:t>
             </a:r>
@@ -16357,9 +16357,9 @@
                 <a:solidFill>
                   <a:srgbClr val="E6EAF2"/>
                 </a:solidFill>
-                <a:latin typeface="나눔고딕코딩"/>
-                <a:ea typeface="나눔고딕코딩"/>
-                <a:cs typeface="나눔고딕코딩"/>
+                <a:latin typeface="D2Coding"/>
+                <a:ea typeface="D2Coding"/>
+                <a:cs typeface="D2Coding"/>
               </a:rPr>
               <a:t>   2026-05  2   ← 취소된 1013 제외</a:t>
             </a:r>
@@ -16375,9 +16375,9 @@
                 <a:solidFill>
                   <a:srgbClr val="E6EAF2"/>
                 </a:solidFill>
-                <a:latin typeface="나눔고딕코딩"/>
-                <a:ea typeface="나눔고딕코딩"/>
-                <a:cs typeface="나눔고딕코딩"/>
+                <a:latin typeface="D2Coding"/>
+                <a:ea typeface="D2Coding"/>
+                <a:cs typeface="D2Coding"/>
               </a:rPr>
               <a:t>   2026-06  2  */</a:t>
             </a:r>
@@ -20908,9 +20908,9 @@
                 <a:solidFill>
                   <a:srgbClr val="7A869C"/>
                 </a:solidFill>
-                <a:latin typeface="나눔고딕코딩"/>
-                <a:ea typeface="나눔고딕코딩"/>
-                <a:cs typeface="나눔고딕코딩"/>
+                <a:latin typeface="D2Coding"/>
+                <a:ea typeface="D2Coding"/>
+                <a:cs typeface="D2Coding"/>
               </a:rPr>
               <a:t>1</a:t>
             </a:r>
@@ -20926,9 +20926,9 @@
                 <a:solidFill>
                   <a:srgbClr val="7A869C"/>
                 </a:solidFill>
-                <a:latin typeface="나눔고딕코딩"/>
-                <a:ea typeface="나눔고딕코딩"/>
-                <a:cs typeface="나눔고딕코딩"/>
+                <a:latin typeface="D2Coding"/>
+                <a:ea typeface="D2Coding"/>
+                <a:cs typeface="D2Coding"/>
               </a:rPr>
               <a:t>2</a:t>
             </a:r>
@@ -20944,9 +20944,9 @@
                 <a:solidFill>
                   <a:srgbClr val="7A869C"/>
                 </a:solidFill>
-                <a:latin typeface="나눔고딕코딩"/>
-                <a:ea typeface="나눔고딕코딩"/>
-                <a:cs typeface="나눔고딕코딩"/>
+                <a:latin typeface="D2Coding"/>
+                <a:ea typeface="D2Coding"/>
+                <a:cs typeface="D2Coding"/>
               </a:rPr>
               <a:t>3</a:t>
             </a:r>
@@ -20962,9 +20962,9 @@
                 <a:solidFill>
                   <a:srgbClr val="7A869C"/>
                 </a:solidFill>
-                <a:latin typeface="나눔고딕코딩"/>
-                <a:ea typeface="나눔고딕코딩"/>
-                <a:cs typeface="나눔고딕코딩"/>
+                <a:latin typeface="D2Coding"/>
+                <a:ea typeface="D2Coding"/>
+                <a:cs typeface="D2Coding"/>
               </a:rPr>
               <a:t>4</a:t>
             </a:r>
@@ -20980,9 +20980,9 @@
                 <a:solidFill>
                   <a:srgbClr val="7A869C"/>
                 </a:solidFill>
-                <a:latin typeface="나눔고딕코딩"/>
-                <a:ea typeface="나눔고딕코딩"/>
-                <a:cs typeface="나눔고딕코딩"/>
+                <a:latin typeface="D2Coding"/>
+                <a:ea typeface="D2Coding"/>
+                <a:cs typeface="D2Coding"/>
               </a:rPr>
               <a:t>5</a:t>
             </a:r>
@@ -20998,9 +20998,9 @@
                 <a:solidFill>
                   <a:srgbClr val="7A869C"/>
                 </a:solidFill>
-                <a:latin typeface="나눔고딕코딩"/>
-                <a:ea typeface="나눔고딕코딩"/>
-                <a:cs typeface="나눔고딕코딩"/>
+                <a:latin typeface="D2Coding"/>
+                <a:ea typeface="D2Coding"/>
+                <a:cs typeface="D2Coding"/>
               </a:rPr>
               <a:t>6</a:t>
             </a:r>
@@ -21016,9 +21016,9 @@
                 <a:solidFill>
                   <a:srgbClr val="7A869C"/>
                 </a:solidFill>
-                <a:latin typeface="나눔고딕코딩"/>
-                <a:ea typeface="나눔고딕코딩"/>
-                <a:cs typeface="나눔고딕코딩"/>
+                <a:latin typeface="D2Coding"/>
+                <a:ea typeface="D2Coding"/>
+                <a:cs typeface="D2Coding"/>
               </a:rPr>
               <a:t>7</a:t>
             </a:r>
@@ -21034,9 +21034,9 @@
                 <a:solidFill>
                   <a:srgbClr val="7A869C"/>
                 </a:solidFill>
-                <a:latin typeface="나눔고딕코딩"/>
-                <a:ea typeface="나눔고딕코딩"/>
-                <a:cs typeface="나눔고딕코딩"/>
+                <a:latin typeface="D2Coding"/>
+                <a:ea typeface="D2Coding"/>
+                <a:cs typeface="D2Coding"/>
               </a:rPr>
               <a:t>8</a:t>
             </a:r>
@@ -21052,9 +21052,9 @@
                 <a:solidFill>
                   <a:srgbClr val="7A869C"/>
                 </a:solidFill>
-                <a:latin typeface="나눔고딕코딩"/>
-                <a:ea typeface="나눔고딕코딩"/>
-                <a:cs typeface="나눔고딕코딩"/>
+                <a:latin typeface="D2Coding"/>
+                <a:ea typeface="D2Coding"/>
+                <a:cs typeface="D2Coding"/>
               </a:rPr>
               <a:t>9</a:t>
             </a:r>
@@ -21093,9 +21093,9 @@
                 <a:solidFill>
                   <a:srgbClr val="E6EAF2"/>
                 </a:solidFill>
-                <a:latin typeface="나눔고딕코딩"/>
-                <a:ea typeface="나눔고딕코딩"/>
-                <a:cs typeface="나눔고딕코딩"/>
+                <a:latin typeface="D2Coding"/>
+                <a:ea typeface="D2Coding"/>
+                <a:cs typeface="D2Coding"/>
               </a:rPr>
               <a:t>SELECT IFNULL(grade, '전체합계') AS 등급,</a:t>
             </a:r>
@@ -21111,9 +21111,9 @@
                 <a:solidFill>
                   <a:srgbClr val="E6EAF2"/>
                 </a:solidFill>
-                <a:latin typeface="나눔고딕코딩"/>
-                <a:ea typeface="나눔고딕코딩"/>
-                <a:cs typeface="나눔고딕코딩"/>
+                <a:latin typeface="D2Coding"/>
+                <a:ea typeface="D2Coding"/>
+                <a:cs typeface="D2Coding"/>
               </a:rPr>
               <a:t>       COUNT(*)                 AS 고객수</a:t>
             </a:r>
@@ -21129,9 +21129,9 @@
                 <a:solidFill>
                   <a:srgbClr val="E6EAF2"/>
                 </a:solidFill>
-                <a:latin typeface="나눔고딕코딩"/>
-                <a:ea typeface="나눔고딕코딩"/>
-                <a:cs typeface="나눔고딕코딩"/>
+                <a:latin typeface="D2Coding"/>
+                <a:ea typeface="D2Coding"/>
+                <a:cs typeface="D2Coding"/>
               </a:rPr>
               <a:t>FROM   customers</a:t>
             </a:r>
@@ -21147,9 +21147,9 @@
                 <a:solidFill>
                   <a:srgbClr val="E6EAF2"/>
                 </a:solidFill>
-                <a:latin typeface="나눔고딕코딩"/>
-                <a:ea typeface="나눔고딕코딩"/>
-                <a:cs typeface="나눔고딕코딩"/>
+                <a:latin typeface="D2Coding"/>
+                <a:ea typeface="D2Coding"/>
+                <a:cs typeface="D2Coding"/>
               </a:rPr>
               <a:t>GROUP BY grade WITH ROLLUP;</a:t>
             </a:r>
@@ -21165,9 +21165,9 @@
                 <a:solidFill>
                   <a:srgbClr val="E6EAF2"/>
                 </a:solidFill>
-                <a:latin typeface="나눔고딕코딩"/>
-                <a:ea typeface="나눔고딕코딩"/>
-                <a:cs typeface="나눔고딕코딩"/>
+                <a:latin typeface="D2Coding"/>
+                <a:ea typeface="D2Coding"/>
+                <a:cs typeface="D2Coding"/>
               </a:rPr>
               <a:t>-- 결과: VIP 2 · GOLD 3 · SILVER 5 + 마지막에 전체합계 10 행</a:t>
             </a:r>
@@ -21183,9 +21183,9 @@
                 <a:solidFill>
                   <a:srgbClr val="E6EAF2"/>
                 </a:solidFill>
-                <a:latin typeface="나눔고딕코딩"/>
-                <a:ea typeface="나눔고딕코딩"/>
-                <a:cs typeface="나눔고딕코딩"/>
+                <a:latin typeface="D2Coding"/>
+                <a:ea typeface="D2Coding"/>
+                <a:cs typeface="D2Coding"/>
               </a:rPr>
               <a:t/>
             </a:r>
@@ -21201,9 +21201,9 @@
                 <a:solidFill>
                   <a:srgbClr val="E6EAF2"/>
                 </a:solidFill>
-                <a:latin typeface="나눔고딕코딩"/>
-                <a:ea typeface="나눔고딕코딩"/>
-                <a:cs typeface="나눔고딕코딩"/>
+                <a:latin typeface="D2Coding"/>
+                <a:ea typeface="D2Coding"/>
+                <a:cs typeface="D2Coding"/>
               </a:rPr>
               <a:t>SELECT category, name, SUM(stock) AS 재고</a:t>
             </a:r>
@@ -21219,9 +21219,9 @@
                 <a:solidFill>
                   <a:srgbClr val="E6EAF2"/>
                 </a:solidFill>
-                <a:latin typeface="나눔고딕코딩"/>
-                <a:ea typeface="나눔고딕코딩"/>
-                <a:cs typeface="나눔고딕코딩"/>
+                <a:latin typeface="D2Coding"/>
+                <a:ea typeface="D2Coding"/>
+                <a:cs typeface="D2Coding"/>
               </a:rPr>
               <a:t>FROM   products</a:t>
             </a:r>
@@ -21237,9 +21237,9 @@
                 <a:solidFill>
                   <a:srgbClr val="E6EAF2"/>
                 </a:solidFill>
-                <a:latin typeface="나눔고딕코딩"/>
-                <a:ea typeface="나눔고딕코딩"/>
-                <a:cs typeface="나눔고딕코딩"/>
+                <a:latin typeface="D2Coding"/>
+                <a:ea typeface="D2Coding"/>
+                <a:cs typeface="D2Coding"/>
               </a:rPr>
               <a:t>GROUP BY category, name WITH ROLLUP;</a:t>
             </a:r>
@@ -22800,9 +22800,9 @@
                 <a:solidFill>
                   <a:srgbClr val="E6EAF2"/>
                 </a:solidFill>
-                <a:latin typeface="나눔고딕코딩"/>
-                <a:ea typeface="나눔고딕코딩"/>
-                <a:cs typeface="나눔고딕코딩"/>
+                <a:latin typeface="D2Coding"/>
+                <a:ea typeface="D2Coding"/>
+                <a:cs typeface="D2Coding"/>
               </a:rPr>
               <a:t>COUNT(*)</a:t>
             </a:r>
@@ -23019,9 +23019,9 @@
                 <a:solidFill>
                   <a:srgbClr val="E6EAF2"/>
                 </a:solidFill>
-                <a:latin typeface="나눔고딕코딩"/>
-                <a:ea typeface="나눔고딕코딩"/>
-                <a:cs typeface="나눔고딕코딩"/>
+                <a:latin typeface="D2Coding"/>
+                <a:ea typeface="D2Coding"/>
+                <a:cs typeface="D2Coding"/>
               </a:rPr>
               <a:t>COUNT(salary)</a:t>
             </a:r>
@@ -23238,9 +23238,9 @@
                 <a:solidFill>
                   <a:srgbClr val="E6EAF2"/>
                 </a:solidFill>
-                <a:latin typeface="나눔고딕코딩"/>
-                <a:ea typeface="나눔고딕코딩"/>
-                <a:cs typeface="나눔고딕코딩"/>
+                <a:latin typeface="D2Coding"/>
+                <a:ea typeface="D2Coding"/>
+                <a:cs typeface="D2Coding"/>
               </a:rPr>
               <a:t>COUNT(DISTINCT dept)</a:t>
             </a:r>
@@ -23457,9 +23457,9 @@
                 <a:solidFill>
                   <a:srgbClr val="E6EAF2"/>
                 </a:solidFill>
-                <a:latin typeface="나눔고딕코딩"/>
-                <a:ea typeface="나눔고딕코딩"/>
-                <a:cs typeface="나눔고딕코딩"/>
+                <a:latin typeface="D2Coding"/>
+                <a:ea typeface="D2Coding"/>
+                <a:cs typeface="D2Coding"/>
               </a:rPr>
               <a:t>AVG(IFNULL(salary, 0))</a:t>
             </a:r>
@@ -23676,9 +23676,9 @@
                 <a:solidFill>
                   <a:srgbClr val="E6EAF2"/>
                 </a:solidFill>
-                <a:latin typeface="나눔고딕코딩"/>
-                <a:ea typeface="나눔고딕코딩"/>
-                <a:cs typeface="나눔고딕코딩"/>
+                <a:latin typeface="D2Coding"/>
+                <a:ea typeface="D2Coding"/>
+                <a:cs typeface="D2Coding"/>
               </a:rPr>
               <a:t>HAVING COUNT(*) &gt;= 2</a:t>
             </a:r>
@@ -23895,9 +23895,9 @@
                 <a:solidFill>
                   <a:srgbClr val="E6EAF2"/>
                 </a:solidFill>
-                <a:latin typeface="나눔고딕코딩"/>
-                <a:ea typeface="나눔고딕코딩"/>
-                <a:cs typeface="나눔고딕코딩"/>
+                <a:latin typeface="D2Coding"/>
+                <a:ea typeface="D2Coding"/>
+                <a:cs typeface="D2Coding"/>
               </a:rPr>
               <a:t>GROUP BY grade WITH ROLLUP</a:t>
             </a:r>
@@ -24114,9 +24114,9 @@
                 <a:solidFill>
                   <a:srgbClr val="E6EAF2"/>
                 </a:solidFill>
-                <a:latin typeface="나눔고딕코딩"/>
-                <a:ea typeface="나눔고딕코딩"/>
-                <a:cs typeface="나눔고딕코딩"/>
+                <a:latin typeface="D2Coding"/>
+                <a:ea typeface="D2Coding"/>
+                <a:cs typeface="D2Coding"/>
               </a:rPr>
               <a:t>SUM(CASE WHEN status = '취소' THEN 1 ELSE 0 END)</a:t>
             </a:r>
@@ -24292,9 +24292,9 @@
                 <a:solidFill>
                   <a:srgbClr val="E6EAF2"/>
                 </a:solidFill>
-                <a:latin typeface="나눔고딕코딩"/>
-                <a:ea typeface="나눔고딕코딩"/>
-                <a:cs typeface="나눔고딕코딩"/>
+                <a:latin typeface="D2Coding"/>
+                <a:ea typeface="D2Coding"/>
+                <a:cs typeface="D2Coding"/>
               </a:rPr>
               <a:t>COUNT(CASE WHEN 조건 THEN 1 END)</a:t>
             </a:r>
@@ -36319,9 +36319,9 @@
                 <a:solidFill>
                   <a:srgbClr val="7A869C"/>
                 </a:solidFill>
-                <a:latin typeface="나눔고딕코딩"/>
-                <a:ea typeface="나눔고딕코딩"/>
-                <a:cs typeface="나눔고딕코딩"/>
+                <a:latin typeface="D2Coding"/>
+                <a:ea typeface="D2Coding"/>
+                <a:cs typeface="D2Coding"/>
               </a:rPr>
               <a:t>1</a:t>
             </a:r>
@@ -36337,9 +36337,9 @@
                 <a:solidFill>
                   <a:srgbClr val="7A869C"/>
                 </a:solidFill>
-                <a:latin typeface="나눔고딕코딩"/>
-                <a:ea typeface="나눔고딕코딩"/>
-                <a:cs typeface="나눔고딕코딩"/>
+                <a:latin typeface="D2Coding"/>
+                <a:ea typeface="D2Coding"/>
+                <a:cs typeface="D2Coding"/>
               </a:rPr>
               <a:t>2</a:t>
             </a:r>
@@ -36355,9 +36355,9 @@
                 <a:solidFill>
                   <a:srgbClr val="7A869C"/>
                 </a:solidFill>
-                <a:latin typeface="나눔고딕코딩"/>
-                <a:ea typeface="나눔고딕코딩"/>
-                <a:cs typeface="나눔고딕코딩"/>
+                <a:latin typeface="D2Coding"/>
+                <a:ea typeface="D2Coding"/>
+                <a:cs typeface="D2Coding"/>
               </a:rPr>
               <a:t>3</a:t>
             </a:r>
@@ -36373,9 +36373,9 @@
                 <a:solidFill>
                   <a:srgbClr val="7A869C"/>
                 </a:solidFill>
-                <a:latin typeface="나눔고딕코딩"/>
-                <a:ea typeface="나눔고딕코딩"/>
-                <a:cs typeface="나눔고딕코딩"/>
+                <a:latin typeface="D2Coding"/>
+                <a:ea typeface="D2Coding"/>
+                <a:cs typeface="D2Coding"/>
               </a:rPr>
               <a:t>4</a:t>
             </a:r>
@@ -36391,9 +36391,9 @@
                 <a:solidFill>
                   <a:srgbClr val="7A869C"/>
                 </a:solidFill>
-                <a:latin typeface="나눔고딕코딩"/>
-                <a:ea typeface="나눔고딕코딩"/>
-                <a:cs typeface="나눔고딕코딩"/>
+                <a:latin typeface="D2Coding"/>
+                <a:ea typeface="D2Coding"/>
+                <a:cs typeface="D2Coding"/>
               </a:rPr>
               <a:t>5</a:t>
             </a:r>
@@ -36409,9 +36409,9 @@
                 <a:solidFill>
                   <a:srgbClr val="7A869C"/>
                 </a:solidFill>
-                <a:latin typeface="나눔고딕코딩"/>
-                <a:ea typeface="나눔고딕코딩"/>
-                <a:cs typeface="나눔고딕코딩"/>
+                <a:latin typeface="D2Coding"/>
+                <a:ea typeface="D2Coding"/>
+                <a:cs typeface="D2Coding"/>
               </a:rPr>
               <a:t>6</a:t>
             </a:r>
@@ -36427,9 +36427,9 @@
                 <a:solidFill>
                   <a:srgbClr val="7A869C"/>
                 </a:solidFill>
-                <a:latin typeface="나눔고딕코딩"/>
-                <a:ea typeface="나눔고딕코딩"/>
-                <a:cs typeface="나눔고딕코딩"/>
+                <a:latin typeface="D2Coding"/>
+                <a:ea typeface="D2Coding"/>
+                <a:cs typeface="D2Coding"/>
               </a:rPr>
               <a:t>7</a:t>
             </a:r>
@@ -36445,9 +36445,9 @@
                 <a:solidFill>
                   <a:srgbClr val="7A869C"/>
                 </a:solidFill>
-                <a:latin typeface="나눔고딕코딩"/>
-                <a:ea typeface="나눔고딕코딩"/>
-                <a:cs typeface="나눔고딕코딩"/>
+                <a:latin typeface="D2Coding"/>
+                <a:ea typeface="D2Coding"/>
+                <a:cs typeface="D2Coding"/>
               </a:rPr>
               <a:t>8</a:t>
             </a:r>
@@ -36463,9 +36463,9 @@
                 <a:solidFill>
                   <a:srgbClr val="7A869C"/>
                 </a:solidFill>
-                <a:latin typeface="나눔고딕코딩"/>
-                <a:ea typeface="나눔고딕코딩"/>
-                <a:cs typeface="나눔고딕코딩"/>
+                <a:latin typeface="D2Coding"/>
+                <a:ea typeface="D2Coding"/>
+                <a:cs typeface="D2Coding"/>
               </a:rPr>
               <a:t>9</a:t>
             </a:r>
@@ -36504,9 +36504,9 @@
                 <a:solidFill>
                   <a:srgbClr val="E6EAF2"/>
                 </a:solidFill>
-                <a:latin typeface="나눔고딕코딩"/>
-                <a:ea typeface="나눔고딕코딩"/>
-                <a:cs typeface="나눔고딕코딩"/>
+                <a:latin typeface="D2Coding"/>
+                <a:ea typeface="D2Coding"/>
+                <a:cs typeface="D2Coding"/>
               </a:rPr>
               <a:t>SELECT COUNT(*)             AS 전체직원수,  -- 8</a:t>
             </a:r>
@@ -36522,9 +36522,9 @@
                 <a:solidFill>
                   <a:srgbClr val="E6EAF2"/>
                 </a:solidFill>
-                <a:latin typeface="나눔고딕코딩"/>
-                <a:ea typeface="나눔고딕코딩"/>
-                <a:cs typeface="나눔고딕코딩"/>
+                <a:latin typeface="D2Coding"/>
+                <a:ea typeface="D2Coding"/>
+                <a:cs typeface="D2Coding"/>
               </a:rPr>
               <a:t>       COUNT(salary)        AS 연봉입력수,  -- 7  (NULL 제외)</a:t>
             </a:r>
@@ -36540,9 +36540,9 @@
                 <a:solidFill>
                   <a:srgbClr val="E6EAF2"/>
                 </a:solidFill>
-                <a:latin typeface="나눔고딕코딩"/>
-                <a:ea typeface="나눔고딕코딩"/>
-                <a:cs typeface="나눔고딕코딩"/>
+                <a:latin typeface="D2Coding"/>
+                <a:ea typeface="D2Coding"/>
+                <a:cs typeface="D2Coding"/>
               </a:rPr>
               <a:t>       COUNT(DISTINCT dept) AS 부서수      -- 4</a:t>
             </a:r>
@@ -36558,9 +36558,9 @@
                 <a:solidFill>
                   <a:srgbClr val="E6EAF2"/>
                 </a:solidFill>
-                <a:latin typeface="나눔고딕코딩"/>
-                <a:ea typeface="나눔고딕코딩"/>
-                <a:cs typeface="나눔고딕코딩"/>
+                <a:latin typeface="D2Coding"/>
+                <a:ea typeface="D2Coding"/>
+                <a:cs typeface="D2Coding"/>
               </a:rPr>
               <a:t>FROM   employees;</a:t>
             </a:r>
@@ -36576,9 +36576,9 @@
                 <a:solidFill>
                   <a:srgbClr val="E6EAF2"/>
                 </a:solidFill>
-                <a:latin typeface="나눔고딕코딩"/>
-                <a:ea typeface="나눔고딕코딩"/>
-                <a:cs typeface="나눔고딕코딩"/>
+                <a:latin typeface="D2Coding"/>
+                <a:ea typeface="D2Coding"/>
+                <a:cs typeface="D2Coding"/>
               </a:rPr>
               <a:t/>
             </a:r>
@@ -36594,9 +36594,9 @@
                 <a:solidFill>
                   <a:srgbClr val="E6EAF2"/>
                 </a:solidFill>
-                <a:latin typeface="나눔고딕코딩"/>
-                <a:ea typeface="나눔고딕코딩"/>
-                <a:cs typeface="나눔고딕코딩"/>
+                <a:latin typeface="D2Coding"/>
+                <a:ea typeface="D2Coding"/>
+                <a:cs typeface="D2Coding"/>
               </a:rPr>
               <a:t>SELECT AVG(salary)                 AS 평균1,</a:t>
             </a:r>
@@ -36612,9 +36612,9 @@
                 <a:solidFill>
                   <a:srgbClr val="E6EAF2"/>
                 </a:solidFill>
-                <a:latin typeface="나눔고딕코딩"/>
-                <a:ea typeface="나눔고딕코딩"/>
-                <a:cs typeface="나눔고딕코딩"/>
+                <a:latin typeface="D2Coding"/>
+                <a:ea typeface="D2Coding"/>
+                <a:cs typeface="D2Coding"/>
               </a:rPr>
               <a:t>       SUM(salary) / COUNT(*)      AS 평균2,</a:t>
             </a:r>
@@ -36630,9 +36630,9 @@
                 <a:solidFill>
                   <a:srgbClr val="E6EAF2"/>
                 </a:solidFill>
-                <a:latin typeface="나눔고딕코딩"/>
-                <a:ea typeface="나눔고딕코딩"/>
-                <a:cs typeface="나눔고딕코딩"/>
+                <a:latin typeface="D2Coding"/>
+                <a:ea typeface="D2Coding"/>
+                <a:cs typeface="D2Coding"/>
               </a:rPr>
               <a:t>       AVG(IFNULL(salary, 0))      AS 평균3</a:t>
             </a:r>
@@ -36648,9 +36648,9 @@
                 <a:solidFill>
                   <a:srgbClr val="E6EAF2"/>
                 </a:solidFill>
-                <a:latin typeface="나눔고딕코딩"/>
-                <a:ea typeface="나눔고딕코딩"/>
-                <a:cs typeface="나눔고딕코딩"/>
+                <a:latin typeface="D2Coding"/>
+                <a:ea typeface="D2Coding"/>
+                <a:cs typeface="D2Coding"/>
               </a:rPr>
               <a:t>FROM   employees;</a:t>
             </a:r>
@@ -38418,9 +38418,9 @@
                 <a:solidFill>
                   <a:srgbClr val="7A869C"/>
                 </a:solidFill>
-                <a:latin typeface="나눔고딕코딩"/>
-                <a:ea typeface="나눔고딕코딩"/>
-                <a:cs typeface="나눔고딕코딩"/>
+                <a:latin typeface="D2Coding"/>
+                <a:ea typeface="D2Coding"/>
+                <a:cs typeface="D2Coding"/>
               </a:rPr>
               <a:t>1</a:t>
             </a:r>
@@ -38436,9 +38436,9 @@
                 <a:solidFill>
                   <a:srgbClr val="7A869C"/>
                 </a:solidFill>
-                <a:latin typeface="나눔고딕코딩"/>
-                <a:ea typeface="나눔고딕코딩"/>
-                <a:cs typeface="나눔고딕코딩"/>
+                <a:latin typeface="D2Coding"/>
+                <a:ea typeface="D2Coding"/>
+                <a:cs typeface="D2Coding"/>
               </a:rPr>
               <a:t>2</a:t>
             </a:r>
@@ -38454,9 +38454,9 @@
                 <a:solidFill>
                   <a:srgbClr val="7A869C"/>
                 </a:solidFill>
-                <a:latin typeface="나눔고딕코딩"/>
-                <a:ea typeface="나눔고딕코딩"/>
-                <a:cs typeface="나눔고딕코딩"/>
+                <a:latin typeface="D2Coding"/>
+                <a:ea typeface="D2Coding"/>
+                <a:cs typeface="D2Coding"/>
               </a:rPr>
               <a:t>3</a:t>
             </a:r>
@@ -38472,9 +38472,9 @@
                 <a:solidFill>
                   <a:srgbClr val="7A869C"/>
                 </a:solidFill>
-                <a:latin typeface="나눔고딕코딩"/>
-                <a:ea typeface="나눔고딕코딩"/>
-                <a:cs typeface="나눔고딕코딩"/>
+                <a:latin typeface="D2Coding"/>
+                <a:ea typeface="D2Coding"/>
+                <a:cs typeface="D2Coding"/>
               </a:rPr>
               <a:t>4</a:t>
             </a:r>
@@ -38490,9 +38490,9 @@
                 <a:solidFill>
                   <a:srgbClr val="7A869C"/>
                 </a:solidFill>
-                <a:latin typeface="나눔고딕코딩"/>
-                <a:ea typeface="나눔고딕코딩"/>
-                <a:cs typeface="나눔고딕코딩"/>
+                <a:latin typeface="D2Coding"/>
+                <a:ea typeface="D2Coding"/>
+                <a:cs typeface="D2Coding"/>
               </a:rPr>
               <a:t>5</a:t>
             </a:r>
@@ -38508,9 +38508,9 @@
                 <a:solidFill>
                   <a:srgbClr val="7A869C"/>
                 </a:solidFill>
-                <a:latin typeface="나눔고딕코딩"/>
-                <a:ea typeface="나눔고딕코딩"/>
-                <a:cs typeface="나눔고딕코딩"/>
+                <a:latin typeface="D2Coding"/>
+                <a:ea typeface="D2Coding"/>
+                <a:cs typeface="D2Coding"/>
               </a:rPr>
               <a:t>6</a:t>
             </a:r>
@@ -38526,9 +38526,9 @@
                 <a:solidFill>
                   <a:srgbClr val="7A869C"/>
                 </a:solidFill>
-                <a:latin typeface="나눔고딕코딩"/>
-                <a:ea typeface="나눔고딕코딩"/>
-                <a:cs typeface="나눔고딕코딩"/>
+                <a:latin typeface="D2Coding"/>
+                <a:ea typeface="D2Coding"/>
+                <a:cs typeface="D2Coding"/>
               </a:rPr>
               <a:t>7</a:t>
             </a:r>
@@ -38544,9 +38544,9 @@
                 <a:solidFill>
                   <a:srgbClr val="7A869C"/>
                 </a:solidFill>
-                <a:latin typeface="나눔고딕코딩"/>
-                <a:ea typeface="나눔고딕코딩"/>
-                <a:cs typeface="나눔고딕코딩"/>
+                <a:latin typeface="D2Coding"/>
+                <a:ea typeface="D2Coding"/>
+                <a:cs typeface="D2Coding"/>
               </a:rPr>
               <a:t>8</a:t>
             </a:r>
@@ -38562,9 +38562,9 @@
                 <a:solidFill>
                   <a:srgbClr val="7A869C"/>
                 </a:solidFill>
-                <a:latin typeface="나눔고딕코딩"/>
-                <a:ea typeface="나눔고딕코딩"/>
-                <a:cs typeface="나눔고딕코딩"/>
+                <a:latin typeface="D2Coding"/>
+                <a:ea typeface="D2Coding"/>
+                <a:cs typeface="D2Coding"/>
               </a:rPr>
               <a:t>9</a:t>
             </a:r>
@@ -38580,9 +38580,9 @@
                 <a:solidFill>
                   <a:srgbClr val="7A869C"/>
                 </a:solidFill>
-                <a:latin typeface="나눔고딕코딩"/>
-                <a:ea typeface="나눔고딕코딩"/>
-                <a:cs typeface="나눔고딕코딩"/>
+                <a:latin typeface="D2Coding"/>
+                <a:ea typeface="D2Coding"/>
+                <a:cs typeface="D2Coding"/>
               </a:rPr>
               <a:t>10</a:t>
             </a:r>
@@ -38598,9 +38598,9 @@
                 <a:solidFill>
                   <a:srgbClr val="7A869C"/>
                 </a:solidFill>
-                <a:latin typeface="나눔고딕코딩"/>
-                <a:ea typeface="나눔고딕코딩"/>
-                <a:cs typeface="나눔고딕코딩"/>
+                <a:latin typeface="D2Coding"/>
+                <a:ea typeface="D2Coding"/>
+                <a:cs typeface="D2Coding"/>
               </a:rPr>
               <a:t>11</a:t>
             </a:r>
@@ -38616,9 +38616,9 @@
                 <a:solidFill>
                   <a:srgbClr val="7A869C"/>
                 </a:solidFill>
-                <a:latin typeface="나눔고딕코딩"/>
-                <a:ea typeface="나눔고딕코딩"/>
-                <a:cs typeface="나눔고딕코딩"/>
+                <a:latin typeface="D2Coding"/>
+                <a:ea typeface="D2Coding"/>
+                <a:cs typeface="D2Coding"/>
               </a:rPr>
               <a:t>12</a:t>
             </a:r>
@@ -38657,9 +38657,9 @@
                 <a:solidFill>
                   <a:srgbClr val="E6EAF2"/>
                 </a:solidFill>
-                <a:latin typeface="나눔고딕코딩"/>
-                <a:ea typeface="나눔고딕코딩"/>
-                <a:cs typeface="나눔고딕코딩"/>
+                <a:latin typeface="D2Coding"/>
+                <a:ea typeface="D2Coding"/>
+                <a:cs typeface="D2Coding"/>
               </a:rPr>
               <a:t>-- 주문 15건 중 emp_id가 NULL인 온라인 주문이 7건이므로</a:t>
             </a:r>
@@ -38675,9 +38675,9 @@
                 <a:solidFill>
                   <a:srgbClr val="E6EAF2"/>
                 </a:solidFill>
-                <a:latin typeface="나눔고딕코딩"/>
-                <a:ea typeface="나눔고딕코딩"/>
-                <a:cs typeface="나눔고딕코딩"/>
+                <a:latin typeface="D2Coding"/>
+                <a:ea typeface="D2Coding"/>
+                <a:cs typeface="D2Coding"/>
               </a:rPr>
               <a:t>SELECT COUNT(*)      AS 전체주문,   -- 15 : 온라인·오프라인 모두</a:t>
             </a:r>
@@ -38693,9 +38693,9 @@
                 <a:solidFill>
                   <a:srgbClr val="E6EAF2"/>
                 </a:solidFill>
-                <a:latin typeface="나눔고딕코딩"/>
-                <a:ea typeface="나눔고딕코딩"/>
-                <a:cs typeface="나눔고딕코딩"/>
+                <a:latin typeface="D2Coding"/>
+                <a:ea typeface="D2Coding"/>
+                <a:cs typeface="D2Coding"/>
               </a:rPr>
               <a:t>       COUNT(emp_id) AS 오프라인주문 -- 8  (온라인 주문 제외)</a:t>
             </a:r>
@@ -38711,9 +38711,9 @@
                 <a:solidFill>
                   <a:srgbClr val="E6EAF2"/>
                 </a:solidFill>
-                <a:latin typeface="나눔고딕코딩"/>
-                <a:ea typeface="나눔고딕코딩"/>
-                <a:cs typeface="나눔고딕코딩"/>
+                <a:latin typeface="D2Coding"/>
+                <a:ea typeface="D2Coding"/>
+                <a:cs typeface="D2Coding"/>
               </a:rPr>
               <a:t>FROM   orders;</a:t>
             </a:r>
@@ -38729,9 +38729,9 @@
                 <a:solidFill>
                   <a:srgbClr val="E6EAF2"/>
                 </a:solidFill>
-                <a:latin typeface="나눔고딕코딩"/>
-                <a:ea typeface="나눔고딕코딩"/>
-                <a:cs typeface="나눔고딕코딩"/>
+                <a:latin typeface="D2Coding"/>
+                <a:ea typeface="D2Coding"/>
+                <a:cs typeface="D2Coding"/>
               </a:rPr>
               <a:t/>
             </a:r>
@@ -38747,9 +38747,9 @@
                 <a:solidFill>
                   <a:srgbClr val="E6EAF2"/>
                 </a:solidFill>
-                <a:latin typeface="나눔고딕코딩"/>
-                <a:ea typeface="나눔고딕코딩"/>
-                <a:cs typeface="나눔고딕코딩"/>
+                <a:latin typeface="D2Coding"/>
+                <a:ea typeface="D2Coding"/>
+                <a:cs typeface="D2Coding"/>
               </a:rPr>
               <a:t>-- 상품 표 전체를 한 줄로 요약 — 그룹이 없으니 결과는 1행</a:t>
             </a:r>
@@ -38765,9 +38765,9 @@
                 <a:solidFill>
                   <a:srgbClr val="E6EAF2"/>
                 </a:solidFill>
-                <a:latin typeface="나눔고딕코딩"/>
-                <a:ea typeface="나눔고딕코딩"/>
-                <a:cs typeface="나눔고딕코딩"/>
+                <a:latin typeface="D2Coding"/>
+                <a:ea typeface="D2Coding"/>
+                <a:cs typeface="D2Coding"/>
               </a:rPr>
               <a:t>SELECT COUNT(*)          AS 상품수,   -- 10 : 등록된 상품 수</a:t>
             </a:r>
@@ -38783,9 +38783,9 @@
                 <a:solidFill>
                   <a:srgbClr val="E6EAF2"/>
                 </a:solidFill>
-                <a:latin typeface="나눔고딕코딩"/>
-                <a:ea typeface="나눔고딕코딩"/>
-                <a:cs typeface="나눔고딕코딩"/>
+                <a:latin typeface="D2Coding"/>
+                <a:ea typeface="D2Coding"/>
+                <a:cs typeface="D2Coding"/>
               </a:rPr>
               <a:t>       ROUND(AVG(price)) AS 평균가,   -- 32620 : 평균 판매가</a:t>
             </a:r>
@@ -38801,9 +38801,9 @@
                 <a:solidFill>
                   <a:srgbClr val="E6EAF2"/>
                 </a:solidFill>
-                <a:latin typeface="나눔고딕코딩"/>
-                <a:ea typeface="나눔고딕코딩"/>
-                <a:cs typeface="나눔고딕코딩"/>
+                <a:latin typeface="D2Coding"/>
+                <a:ea typeface="D2Coding"/>
+                <a:cs typeface="D2Coding"/>
               </a:rPr>
               <a:t>       MAX(price)        AS 최고가,   -- 189000 (공기청정기)</a:t>
             </a:r>
@@ -38819,9 +38819,9 @@
                 <a:solidFill>
                   <a:srgbClr val="E6EAF2"/>
                 </a:solidFill>
-                <a:latin typeface="나눔고딕코딩"/>
-                <a:ea typeface="나눔고딕코딩"/>
-                <a:cs typeface="나눔고딕코딩"/>
+                <a:latin typeface="D2Coding"/>
+                <a:ea typeface="D2Coding"/>
+                <a:cs typeface="D2Coding"/>
               </a:rPr>
               <a:t>       MIN(price)        AS 최저가,   -- 3200 (A5 스프링 노트)</a:t>
             </a:r>
@@ -38837,9 +38837,9 @@
                 <a:solidFill>
                   <a:srgbClr val="E6EAF2"/>
                 </a:solidFill>
-                <a:latin typeface="나눔고딕코딩"/>
-                <a:ea typeface="나눔고딕코딩"/>
-                <a:cs typeface="나눔고딕코딩"/>
+                <a:latin typeface="D2Coding"/>
+                <a:ea typeface="D2Coding"/>
+                <a:cs typeface="D2Coding"/>
               </a:rPr>
               <a:t>       SUM(stock)        AS 총재고    -- 모든 상품의 재고 수량 합계</a:t>
             </a:r>
@@ -38855,9 +38855,9 @@
                 <a:solidFill>
                   <a:srgbClr val="E6EAF2"/>
                 </a:solidFill>
-                <a:latin typeface="나눔고딕코딩"/>
-                <a:ea typeface="나눔고딕코딩"/>
-                <a:cs typeface="나눔고딕코딩"/>
+                <a:latin typeface="D2Coding"/>
+                <a:ea typeface="D2Coding"/>
+                <a:cs typeface="D2Coding"/>
               </a:rPr>
               <a:t>FROM   products;</a:t>
             </a:r>
@@ -39841,9 +39841,9 @@
                 <a:solidFill>
                   <a:srgbClr val="7A869C"/>
                 </a:solidFill>
-                <a:latin typeface="나눔고딕코딩"/>
-                <a:ea typeface="나눔고딕코딩"/>
-                <a:cs typeface="나눔고딕코딩"/>
+                <a:latin typeface="D2Coding"/>
+                <a:ea typeface="D2Coding"/>
+                <a:cs typeface="D2Coding"/>
               </a:rPr>
               <a:t>1</a:t>
             </a:r>
@@ -39859,9 +39859,9 @@
                 <a:solidFill>
                   <a:srgbClr val="7A869C"/>
                 </a:solidFill>
-                <a:latin typeface="나눔고딕코딩"/>
-                <a:ea typeface="나눔고딕코딩"/>
-                <a:cs typeface="나눔고딕코딩"/>
+                <a:latin typeface="D2Coding"/>
+                <a:ea typeface="D2Coding"/>
+                <a:cs typeface="D2Coding"/>
               </a:rPr>
               <a:t>2</a:t>
             </a:r>
@@ -39877,9 +39877,9 @@
                 <a:solidFill>
                   <a:srgbClr val="7A869C"/>
                 </a:solidFill>
-                <a:latin typeface="나눔고딕코딩"/>
-                <a:ea typeface="나눔고딕코딩"/>
-                <a:cs typeface="나눔고딕코딩"/>
+                <a:latin typeface="D2Coding"/>
+                <a:ea typeface="D2Coding"/>
+                <a:cs typeface="D2Coding"/>
               </a:rPr>
               <a:t>3</a:t>
             </a:r>
@@ -39895,9 +39895,9 @@
                 <a:solidFill>
                   <a:srgbClr val="7A869C"/>
                 </a:solidFill>
-                <a:latin typeface="나눔고딕코딩"/>
-                <a:ea typeface="나눔고딕코딩"/>
-                <a:cs typeface="나눔고딕코딩"/>
+                <a:latin typeface="D2Coding"/>
+                <a:ea typeface="D2Coding"/>
+                <a:cs typeface="D2Coding"/>
               </a:rPr>
               <a:t>4</a:t>
             </a:r>
@@ -39913,9 +39913,9 @@
                 <a:solidFill>
                   <a:srgbClr val="7A869C"/>
                 </a:solidFill>
-                <a:latin typeface="나눔고딕코딩"/>
-                <a:ea typeface="나눔고딕코딩"/>
-                <a:cs typeface="나눔고딕코딩"/>
+                <a:latin typeface="D2Coding"/>
+                <a:ea typeface="D2Coding"/>
+                <a:cs typeface="D2Coding"/>
               </a:rPr>
               <a:t>5</a:t>
             </a:r>
@@ -39931,9 +39931,9 @@
                 <a:solidFill>
                   <a:srgbClr val="7A869C"/>
                 </a:solidFill>
-                <a:latin typeface="나눔고딕코딩"/>
-                <a:ea typeface="나눔고딕코딩"/>
-                <a:cs typeface="나눔고딕코딩"/>
+                <a:latin typeface="D2Coding"/>
+                <a:ea typeface="D2Coding"/>
+                <a:cs typeface="D2Coding"/>
               </a:rPr>
               <a:t>6</a:t>
             </a:r>
@@ -39949,9 +39949,9 @@
                 <a:solidFill>
                   <a:srgbClr val="7A869C"/>
                 </a:solidFill>
-                <a:latin typeface="나눔고딕코딩"/>
-                <a:ea typeface="나눔고딕코딩"/>
-                <a:cs typeface="나눔고딕코딩"/>
+                <a:latin typeface="D2Coding"/>
+                <a:ea typeface="D2Coding"/>
+                <a:cs typeface="D2Coding"/>
               </a:rPr>
               <a:t>7</a:t>
             </a:r>
@@ -39967,9 +39967,9 @@
                 <a:solidFill>
                   <a:srgbClr val="7A869C"/>
                 </a:solidFill>
-                <a:latin typeface="나눔고딕코딩"/>
-                <a:ea typeface="나눔고딕코딩"/>
-                <a:cs typeface="나눔고딕코딩"/>
+                <a:latin typeface="D2Coding"/>
+                <a:ea typeface="D2Coding"/>
+                <a:cs typeface="D2Coding"/>
               </a:rPr>
               <a:t>8</a:t>
             </a:r>
@@ -39985,9 +39985,9 @@
                 <a:solidFill>
                   <a:srgbClr val="7A869C"/>
                 </a:solidFill>
-                <a:latin typeface="나눔고딕코딩"/>
-                <a:ea typeface="나눔고딕코딩"/>
-                <a:cs typeface="나눔고딕코딩"/>
+                <a:latin typeface="D2Coding"/>
+                <a:ea typeface="D2Coding"/>
+                <a:cs typeface="D2Coding"/>
               </a:rPr>
               <a:t>9</a:t>
             </a:r>
@@ -40003,9 +40003,9 @@
                 <a:solidFill>
                   <a:srgbClr val="7A869C"/>
                 </a:solidFill>
-                <a:latin typeface="나눔고딕코딩"/>
-                <a:ea typeface="나눔고딕코딩"/>
-                <a:cs typeface="나눔고딕코딩"/>
+                <a:latin typeface="D2Coding"/>
+                <a:ea typeface="D2Coding"/>
+                <a:cs typeface="D2Coding"/>
               </a:rPr>
               <a:t>10</a:t>
             </a:r>
@@ -40044,9 +40044,9 @@
                 <a:solidFill>
                   <a:srgbClr val="E6EAF2"/>
                 </a:solidFill>
-                <a:latin typeface="나눔고딕코딩"/>
-                <a:ea typeface="나눔고딕코딩"/>
-                <a:cs typeface="나눔고딕코딩"/>
+                <a:latin typeface="D2Coding"/>
+                <a:ea typeface="D2Coding"/>
+                <a:cs typeface="D2Coding"/>
               </a:rPr>
               <a:t>SELECT category,</a:t>
             </a:r>
@@ -40062,9 +40062,9 @@
                 <a:solidFill>
                   <a:srgbClr val="E6EAF2"/>
                 </a:solidFill>
-                <a:latin typeface="나눔고딕코딩"/>
-                <a:ea typeface="나눔고딕코딩"/>
-                <a:cs typeface="나눔고딕코딩"/>
+                <a:latin typeface="D2Coding"/>
+                <a:ea typeface="D2Coding"/>
+                <a:cs typeface="D2Coding"/>
               </a:rPr>
               <a:t>       COUNT(*)          AS 상품수,</a:t>
             </a:r>
@@ -40080,9 +40080,9 @@
                 <a:solidFill>
                   <a:srgbClr val="E6EAF2"/>
                 </a:solidFill>
-                <a:latin typeface="나눔고딕코딩"/>
-                <a:ea typeface="나눔고딕코딩"/>
-                <a:cs typeface="나눔고딕코딩"/>
+                <a:latin typeface="D2Coding"/>
+                <a:ea typeface="D2Coding"/>
+                <a:cs typeface="D2Coding"/>
               </a:rPr>
               <a:t>       ROUND(AVG(price)) AS 평균가</a:t>
             </a:r>
@@ -40098,9 +40098,9 @@
                 <a:solidFill>
                   <a:srgbClr val="E6EAF2"/>
                 </a:solidFill>
-                <a:latin typeface="나눔고딕코딩"/>
-                <a:ea typeface="나눔고딕코딩"/>
-                <a:cs typeface="나눔고딕코딩"/>
+                <a:latin typeface="D2Coding"/>
+                <a:ea typeface="D2Coding"/>
+                <a:cs typeface="D2Coding"/>
               </a:rPr>
               <a:t>FROM   products</a:t>
             </a:r>
@@ -40116,9 +40116,9 @@
                 <a:solidFill>
                   <a:srgbClr val="E6EAF2"/>
                 </a:solidFill>
-                <a:latin typeface="나눔고딕코딩"/>
-                <a:ea typeface="나눔고딕코딩"/>
-                <a:cs typeface="나눔고딕코딩"/>
+                <a:latin typeface="D2Coding"/>
+                <a:ea typeface="D2Coding"/>
+                <a:cs typeface="D2Coding"/>
               </a:rPr>
               <a:t>GROUP BY category;</a:t>
             </a:r>
@@ -40134,9 +40134,9 @@
                 <a:solidFill>
                   <a:srgbClr val="E6EAF2"/>
                 </a:solidFill>
-                <a:latin typeface="나눔고딕코딩"/>
-                <a:ea typeface="나눔고딕코딩"/>
-                <a:cs typeface="나눔고딕코딩"/>
+                <a:latin typeface="D2Coding"/>
+                <a:ea typeface="D2Coding"/>
+                <a:cs typeface="D2Coding"/>
               </a:rPr>
               <a:t>/* 결과</a:t>
             </a:r>
@@ -40152,9 +40152,9 @@
                 <a:solidFill>
                   <a:srgbClr val="E6EAF2"/>
                 </a:solidFill>
-                <a:latin typeface="나눔고딕코딩"/>
-                <a:ea typeface="나눔고딕코딩"/>
-                <a:cs typeface="나눔고딕코딩"/>
+                <a:latin typeface="D2Coding"/>
+                <a:ea typeface="D2Coding"/>
+                <a:cs typeface="D2Coding"/>
               </a:rPr>
               <a:t>   가전      2  115500</a:t>
             </a:r>
@@ -40170,9 +40170,9 @@
                 <a:solidFill>
                   <a:srgbClr val="E6EAF2"/>
                 </a:solidFill>
-                <a:latin typeface="나눔고딕코딩"/>
-                <a:ea typeface="나눔고딕코딩"/>
-                <a:cs typeface="나눔고딕코딩"/>
+                <a:latin typeface="D2Coding"/>
+                <a:ea typeface="D2Coding"/>
+                <a:cs typeface="D2Coding"/>
               </a:rPr>
               <a:t>   식품      3   19433</a:t>
             </a:r>
@@ -40188,9 +40188,9 @@
                 <a:solidFill>
                   <a:srgbClr val="E6EAF2"/>
                 </a:solidFill>
-                <a:latin typeface="나눔고딕코딩"/>
-                <a:ea typeface="나눔고딕코딩"/>
-                <a:cs typeface="나눔고딕코딩"/>
+                <a:latin typeface="D2Coding"/>
+                <a:ea typeface="D2Coding"/>
+                <a:cs typeface="D2Coding"/>
               </a:rPr>
               <a:t>   생활용품  3    9733</a:t>
             </a:r>
@@ -40206,9 +40206,9 @@
                 <a:solidFill>
                   <a:srgbClr val="E6EAF2"/>
                 </a:solidFill>
-                <a:latin typeface="나눔고딕코딩"/>
-                <a:ea typeface="나눔고딕코딩"/>
-                <a:cs typeface="나눔고딕코딩"/>
+                <a:latin typeface="D2Coding"/>
+                <a:ea typeface="D2Coding"/>
+                <a:cs typeface="D2Coding"/>
               </a:rPr>
               <a:t>   문구      2    3850  */</a:t>
             </a:r>
@@ -42107,9 +42107,9 @@
                 <a:solidFill>
                   <a:srgbClr val="7A869C"/>
                 </a:solidFill>
-                <a:latin typeface="나눔고딕코딩"/>
-                <a:ea typeface="나눔고딕코딩"/>
-                <a:cs typeface="나눔고딕코딩"/>
+                <a:latin typeface="D2Coding"/>
+                <a:ea typeface="D2Coding"/>
+                <a:cs typeface="D2Coding"/>
               </a:rPr>
               <a:t>1</a:t>
             </a:r>
@@ -42125,9 +42125,9 @@
                 <a:solidFill>
                   <a:srgbClr val="7A869C"/>
                 </a:solidFill>
-                <a:latin typeface="나눔고딕코딩"/>
-                <a:ea typeface="나눔고딕코딩"/>
-                <a:cs typeface="나눔고딕코딩"/>
+                <a:latin typeface="D2Coding"/>
+                <a:ea typeface="D2Coding"/>
+                <a:cs typeface="D2Coding"/>
               </a:rPr>
               <a:t>2</a:t>
             </a:r>
@@ -42143,9 +42143,9 @@
                 <a:solidFill>
                   <a:srgbClr val="7A869C"/>
                 </a:solidFill>
-                <a:latin typeface="나눔고딕코딩"/>
-                <a:ea typeface="나눔고딕코딩"/>
-                <a:cs typeface="나눔고딕코딩"/>
+                <a:latin typeface="D2Coding"/>
+                <a:ea typeface="D2Coding"/>
+                <a:cs typeface="D2Coding"/>
               </a:rPr>
               <a:t>3</a:t>
             </a:r>
@@ -42184,9 +42184,9 @@
                 <a:solidFill>
                   <a:srgbClr val="E6EAF2"/>
                 </a:solidFill>
-                <a:latin typeface="나눔고딕코딩"/>
-                <a:ea typeface="나눔고딕코딩"/>
-                <a:cs typeface="나눔고딕코딩"/>
+                <a:latin typeface="D2Coding"/>
+                <a:ea typeface="D2Coding"/>
+                <a:cs typeface="D2Coding"/>
               </a:rPr>
               <a:t>SELECT grade, COUNT(*) AS 고객수</a:t>
             </a:r>
@@ -42202,9 +42202,9 @@
                 <a:solidFill>
                   <a:srgbClr val="E6EAF2"/>
                 </a:solidFill>
-                <a:latin typeface="나눔고딕코딩"/>
-                <a:ea typeface="나눔고딕코딩"/>
-                <a:cs typeface="나눔고딕코딩"/>
+                <a:latin typeface="D2Coding"/>
+                <a:ea typeface="D2Coding"/>
+                <a:cs typeface="D2Coding"/>
               </a:rPr>
               <a:t>FROM   customers</a:t>
             </a:r>
@@ -42220,9 +42220,9 @@
                 <a:solidFill>
                   <a:srgbClr val="E6EAF2"/>
                 </a:solidFill>
-                <a:latin typeface="나눔고딕코딩"/>
-                <a:ea typeface="나눔고딕코딩"/>
-                <a:cs typeface="나눔고딕코딩"/>
+                <a:latin typeface="D2Coding"/>
+                <a:ea typeface="D2Coding"/>
+                <a:cs typeface="D2Coding"/>
               </a:rPr>
               <a:t>GROUP BY grade;</a:t>
             </a:r>
@@ -42514,9 +42514,9 @@
                 <a:solidFill>
                   <a:srgbClr val="7A869C"/>
                 </a:solidFill>
-                <a:latin typeface="나눔고딕코딩"/>
-                <a:ea typeface="나눔고딕코딩"/>
-                <a:cs typeface="나눔고딕코딩"/>
+                <a:latin typeface="D2Coding"/>
+                <a:ea typeface="D2Coding"/>
+                <a:cs typeface="D2Coding"/>
               </a:rPr>
               <a:t>1</a:t>
             </a:r>
@@ -42532,9 +42532,9 @@
                 <a:solidFill>
                   <a:srgbClr val="7A869C"/>
                 </a:solidFill>
-                <a:latin typeface="나눔고딕코딩"/>
-                <a:ea typeface="나눔고딕코딩"/>
-                <a:cs typeface="나눔고딕코딩"/>
+                <a:latin typeface="D2Coding"/>
+                <a:ea typeface="D2Coding"/>
+                <a:cs typeface="D2Coding"/>
               </a:rPr>
               <a:t>2</a:t>
             </a:r>
@@ -42550,9 +42550,9 @@
                 <a:solidFill>
                   <a:srgbClr val="7A869C"/>
                 </a:solidFill>
-                <a:latin typeface="나눔고딕코딩"/>
-                <a:ea typeface="나눔고딕코딩"/>
-                <a:cs typeface="나눔고딕코딩"/>
+                <a:latin typeface="D2Coding"/>
+                <a:ea typeface="D2Coding"/>
+                <a:cs typeface="D2Coding"/>
               </a:rPr>
               <a:t>3</a:t>
             </a:r>
@@ -42568,9 +42568,9 @@
                 <a:solidFill>
                   <a:srgbClr val="7A869C"/>
                 </a:solidFill>
-                <a:latin typeface="나눔고딕코딩"/>
-                <a:ea typeface="나눔고딕코딩"/>
-                <a:cs typeface="나눔고딕코딩"/>
+                <a:latin typeface="D2Coding"/>
+                <a:ea typeface="D2Coding"/>
+                <a:cs typeface="D2Coding"/>
               </a:rPr>
               <a:t>4</a:t>
             </a:r>
@@ -42609,9 +42609,9 @@
                 <a:solidFill>
                   <a:srgbClr val="E6EAF2"/>
                 </a:solidFill>
-                <a:latin typeface="나눔고딕코딩"/>
-                <a:ea typeface="나눔고딕코딩"/>
-                <a:cs typeface="나눔고딕코딩"/>
+                <a:latin typeface="D2Coding"/>
+                <a:ea typeface="D2Coding"/>
+                <a:cs typeface="D2Coding"/>
               </a:rPr>
               <a:t>SELECT grade, city, COUNT(*) AS 고객수</a:t>
             </a:r>
@@ -42627,9 +42627,9 @@
                 <a:solidFill>
                   <a:srgbClr val="E6EAF2"/>
                 </a:solidFill>
-                <a:latin typeface="나눔고딕코딩"/>
-                <a:ea typeface="나눔고딕코딩"/>
-                <a:cs typeface="나눔고딕코딩"/>
+                <a:latin typeface="D2Coding"/>
+                <a:ea typeface="D2Coding"/>
+                <a:cs typeface="D2Coding"/>
               </a:rPr>
               <a:t>FROM   customers</a:t>
             </a:r>
@@ -42645,9 +42645,9 @@
                 <a:solidFill>
                   <a:srgbClr val="E6EAF2"/>
                 </a:solidFill>
-                <a:latin typeface="나눔고딕코딩"/>
-                <a:ea typeface="나눔고딕코딩"/>
-                <a:cs typeface="나눔고딕코딩"/>
+                <a:latin typeface="D2Coding"/>
+                <a:ea typeface="D2Coding"/>
+                <a:cs typeface="D2Coding"/>
               </a:rPr>
               <a:t>GROUP BY grade, city</a:t>
             </a:r>
@@ -42663,9 +42663,9 @@
                 <a:solidFill>
                   <a:srgbClr val="E6EAF2"/>
                 </a:solidFill>
-                <a:latin typeface="나눔고딕코딩"/>
-                <a:ea typeface="나눔고딕코딩"/>
-                <a:cs typeface="나눔고딕코딩"/>
+                <a:latin typeface="D2Coding"/>
+                <a:ea typeface="D2Coding"/>
+                <a:cs typeface="D2Coding"/>
               </a:rPr>
               <a:t>ORDER BY grade, city;</a:t>
             </a:r>
@@ -43349,9 +43349,9 @@
                 <a:solidFill>
                   <a:srgbClr val="7A869C"/>
                 </a:solidFill>
-                <a:latin typeface="나눔고딕코딩"/>
-                <a:ea typeface="나눔고딕코딩"/>
-                <a:cs typeface="나눔고딕코딩"/>
+                <a:latin typeface="D2Coding"/>
+                <a:ea typeface="D2Coding"/>
+                <a:cs typeface="D2Coding"/>
               </a:rPr>
               <a:t>1</a:t>
             </a:r>
@@ -43367,9 +43367,9 @@
                 <a:solidFill>
                   <a:srgbClr val="7A869C"/>
                 </a:solidFill>
-                <a:latin typeface="나눔고딕코딩"/>
-                <a:ea typeface="나눔고딕코딩"/>
-                <a:cs typeface="나눔고딕코딩"/>
+                <a:latin typeface="D2Coding"/>
+                <a:ea typeface="D2Coding"/>
+                <a:cs typeface="D2Coding"/>
               </a:rPr>
               <a:t>2</a:t>
             </a:r>
@@ -43385,9 +43385,9 @@
                 <a:solidFill>
                   <a:srgbClr val="7A869C"/>
                 </a:solidFill>
-                <a:latin typeface="나눔고딕코딩"/>
-                <a:ea typeface="나눔고딕코딩"/>
-                <a:cs typeface="나눔고딕코딩"/>
+                <a:latin typeface="D2Coding"/>
+                <a:ea typeface="D2Coding"/>
+                <a:cs typeface="D2Coding"/>
               </a:rPr>
               <a:t>3</a:t>
             </a:r>
@@ -43403,9 +43403,9 @@
                 <a:solidFill>
                   <a:srgbClr val="7A869C"/>
                 </a:solidFill>
-                <a:latin typeface="나눔고딕코딩"/>
-                <a:ea typeface="나눔고딕코딩"/>
-                <a:cs typeface="나눔고딕코딩"/>
+                <a:latin typeface="D2Coding"/>
+                <a:ea typeface="D2Coding"/>
+                <a:cs typeface="D2Coding"/>
               </a:rPr>
               <a:t>4</a:t>
             </a:r>
@@ -43421,9 +43421,9 @@
                 <a:solidFill>
                   <a:srgbClr val="7A869C"/>
                 </a:solidFill>
-                <a:latin typeface="나눔고딕코딩"/>
-                <a:ea typeface="나눔고딕코딩"/>
-                <a:cs typeface="나눔고딕코딩"/>
+                <a:latin typeface="D2Coding"/>
+                <a:ea typeface="D2Coding"/>
+                <a:cs typeface="D2Coding"/>
               </a:rPr>
               <a:t>5</a:t>
             </a:r>
@@ -43439,9 +43439,9 @@
                 <a:solidFill>
                   <a:srgbClr val="7A869C"/>
                 </a:solidFill>
-                <a:latin typeface="나눔고딕코딩"/>
-                <a:ea typeface="나눔고딕코딩"/>
-                <a:cs typeface="나눔고딕코딩"/>
+                <a:latin typeface="D2Coding"/>
+                <a:ea typeface="D2Coding"/>
+                <a:cs typeface="D2Coding"/>
               </a:rPr>
               <a:t>6</a:t>
             </a:r>
@@ -43457,9 +43457,9 @@
                 <a:solidFill>
                   <a:srgbClr val="7A869C"/>
                 </a:solidFill>
-                <a:latin typeface="나눔고딕코딩"/>
-                <a:ea typeface="나눔고딕코딩"/>
-                <a:cs typeface="나눔고딕코딩"/>
+                <a:latin typeface="D2Coding"/>
+                <a:ea typeface="D2Coding"/>
+                <a:cs typeface="D2Coding"/>
               </a:rPr>
               <a:t>7</a:t>
             </a:r>
@@ -43475,9 +43475,9 @@
                 <a:solidFill>
                   <a:srgbClr val="7A869C"/>
                 </a:solidFill>
-                <a:latin typeface="나눔고딕코딩"/>
-                <a:ea typeface="나눔고딕코딩"/>
-                <a:cs typeface="나눔고딕코딩"/>
+                <a:latin typeface="D2Coding"/>
+                <a:ea typeface="D2Coding"/>
+                <a:cs typeface="D2Coding"/>
               </a:rPr>
               <a:t>8</a:t>
             </a:r>
@@ -43493,9 +43493,9 @@
                 <a:solidFill>
                   <a:srgbClr val="7A869C"/>
                 </a:solidFill>
-                <a:latin typeface="나눔고딕코딩"/>
-                <a:ea typeface="나눔고딕코딩"/>
-                <a:cs typeface="나눔고딕코딩"/>
+                <a:latin typeface="D2Coding"/>
+                <a:ea typeface="D2Coding"/>
+                <a:cs typeface="D2Coding"/>
               </a:rPr>
               <a:t>9</a:t>
             </a:r>
@@ -43511,9 +43511,9 @@
                 <a:solidFill>
                   <a:srgbClr val="7A869C"/>
                 </a:solidFill>
-                <a:latin typeface="나눔고딕코딩"/>
-                <a:ea typeface="나눔고딕코딩"/>
-                <a:cs typeface="나눔고딕코딩"/>
+                <a:latin typeface="D2Coding"/>
+                <a:ea typeface="D2Coding"/>
+                <a:cs typeface="D2Coding"/>
               </a:rPr>
               <a:t>10</a:t>
             </a:r>
@@ -43529,9 +43529,9 @@
                 <a:solidFill>
                   <a:srgbClr val="7A869C"/>
                 </a:solidFill>
-                <a:latin typeface="나눔고딕코딩"/>
-                <a:ea typeface="나눔고딕코딩"/>
-                <a:cs typeface="나눔고딕코딩"/>
+                <a:latin typeface="D2Coding"/>
+                <a:ea typeface="D2Coding"/>
+                <a:cs typeface="D2Coding"/>
               </a:rPr>
               <a:t>11</a:t>
             </a:r>
@@ -43570,9 +43570,9 @@
                 <a:solidFill>
                   <a:srgbClr val="E6EAF2"/>
                 </a:solidFill>
-                <a:latin typeface="나눔고딕코딩"/>
-                <a:ea typeface="나눔고딕코딩"/>
-                <a:cs typeface="나눔고딕코딩"/>
+                <a:latin typeface="D2Coding"/>
+                <a:ea typeface="D2Coding"/>
+                <a:cs typeface="D2Coding"/>
               </a:rPr>
               <a:t>SELECT dept,</a:t>
             </a:r>
@@ -43588,9 +43588,9 @@
                 <a:solidFill>
                   <a:srgbClr val="E6EAF2"/>
                 </a:solidFill>
-                <a:latin typeface="나눔고딕코딩"/>
-                <a:ea typeface="나눔고딕코딩"/>
-                <a:cs typeface="나눔고딕코딩"/>
+                <a:latin typeface="D2Coding"/>
+                <a:ea typeface="D2Coding"/>
+                <a:cs typeface="D2Coding"/>
               </a:rPr>
               <a:t>       COUNT(*)             AS 직원수,</a:t>
             </a:r>
@@ -43606,9 +43606,9 @@
                 <a:solidFill>
                   <a:srgbClr val="E6EAF2"/>
                 </a:solidFill>
-                <a:latin typeface="나눔고딕코딩"/>
-                <a:ea typeface="나눔고딕코딩"/>
-                <a:cs typeface="나눔고딕코딩"/>
+                <a:latin typeface="D2Coding"/>
+                <a:ea typeface="D2Coding"/>
+                <a:cs typeface="D2Coding"/>
               </a:rPr>
               <a:t>       COUNT(salary)        AS 연봉입력수,</a:t>
             </a:r>
@@ -43624,9 +43624,9 @@
                 <a:solidFill>
                   <a:srgbClr val="E6EAF2"/>
                 </a:solidFill>
-                <a:latin typeface="나눔고딕코딩"/>
-                <a:ea typeface="나눔고딕코딩"/>
-                <a:cs typeface="나눔고딕코딩"/>
+                <a:latin typeface="D2Coding"/>
+                <a:ea typeface="D2Coding"/>
+                <a:cs typeface="D2Coding"/>
               </a:rPr>
               <a:t>       ROUND(AVG(salary),1) AS 평균연봉</a:t>
             </a:r>
@@ -43642,9 +43642,9 @@
                 <a:solidFill>
                   <a:srgbClr val="E6EAF2"/>
                 </a:solidFill>
-                <a:latin typeface="나눔고딕코딩"/>
-                <a:ea typeface="나눔고딕코딩"/>
-                <a:cs typeface="나눔고딕코딩"/>
+                <a:latin typeface="D2Coding"/>
+                <a:ea typeface="D2Coding"/>
+                <a:cs typeface="D2Coding"/>
               </a:rPr>
               <a:t>FROM   employees</a:t>
             </a:r>
@@ -43660,9 +43660,9 @@
                 <a:solidFill>
                   <a:srgbClr val="E6EAF2"/>
                 </a:solidFill>
-                <a:latin typeface="나눔고딕코딩"/>
-                <a:ea typeface="나눔고딕코딩"/>
-                <a:cs typeface="나눔고딕코딩"/>
+                <a:latin typeface="D2Coding"/>
+                <a:ea typeface="D2Coding"/>
+                <a:cs typeface="D2Coding"/>
               </a:rPr>
               <a:t>GROUP BY dept;</a:t>
             </a:r>
@@ -43678,9 +43678,9 @@
                 <a:solidFill>
                   <a:srgbClr val="E6EAF2"/>
                 </a:solidFill>
-                <a:latin typeface="나눔고딕코딩"/>
-                <a:ea typeface="나눔고딕코딩"/>
-                <a:cs typeface="나눔고딕코딩"/>
+                <a:latin typeface="D2Coding"/>
+                <a:ea typeface="D2Coding"/>
+                <a:cs typeface="D2Coding"/>
               </a:rPr>
               <a:t>/* 결과</a:t>
             </a:r>
@@ -43696,9 +43696,9 @@
                 <a:solidFill>
                   <a:srgbClr val="E6EAF2"/>
                 </a:solidFill>
-                <a:latin typeface="나눔고딕코딩"/>
-                <a:ea typeface="나눔고딕코딩"/>
-                <a:cs typeface="나눔고딕코딩"/>
+                <a:latin typeface="D2Coding"/>
+                <a:ea typeface="D2Coding"/>
+                <a:cs typeface="D2Coding"/>
               </a:rPr>
               <a:t>   영업팀      3  3  403.3</a:t>
             </a:r>
@@ -43714,9 +43714,9 @@
                 <a:solidFill>
                   <a:srgbClr val="E6EAF2"/>
                 </a:solidFill>
-                <a:latin typeface="나눔고딕코딩"/>
-                <a:ea typeface="나눔고딕코딩"/>
-                <a:cs typeface="나눔고딕코딩"/>
+                <a:latin typeface="D2Coding"/>
+                <a:ea typeface="D2Coding"/>
+                <a:cs typeface="D2Coding"/>
               </a:rPr>
               <a:t>   마케팅팀    2  2  410.0</a:t>
             </a:r>
@@ -43732,9 +43732,9 @@
                 <a:solidFill>
                   <a:srgbClr val="E6EAF2"/>
                 </a:solidFill>
-                <a:latin typeface="나눔고딕코딩"/>
-                <a:ea typeface="나눔고딕코딩"/>
-                <a:cs typeface="나눔고딕코딩"/>
+                <a:latin typeface="D2Coding"/>
+                <a:ea typeface="D2Coding"/>
+                <a:cs typeface="D2Coding"/>
               </a:rPr>
               <a:t>   물류팀      2  2  390.0</a:t>
             </a:r>
@@ -43750,9 +43750,9 @@
                 <a:solidFill>
                   <a:srgbClr val="E6EAF2"/>
                 </a:solidFill>
-                <a:latin typeface="나눔고딕코딩"/>
-                <a:ea typeface="나눔고딕코딩"/>
-                <a:cs typeface="나눔고딕코딩"/>
+                <a:latin typeface="D2Coding"/>
+                <a:ea typeface="D2Coding"/>
+                <a:cs typeface="D2Coding"/>
               </a:rPr>
               <a:t>   경영지원팀  1  0  NULL   */</a:t>
             </a:r>
